--- a/output/chaayos/chaayos_enhanced_brand_book.pptx
+++ b/output/chaayos/chaayos_enhanced_brand_book.pptx
@@ -25,6 +25,7 @@
     <p:sldId id="273" r:id="rId24"/>
     <p:sldId id="274" r:id="rId25"/>
     <p:sldId id="275" r:id="rId26"/>
+    <p:sldId id="276" r:id="rId27"/>
   </p:sldIdLst>
   <p:sldSz cx="9144000" cy="6858000" type="screen4x3"/>
   <p:notesSz cx="6858000" cy="9144000"/>
@@ -3117,7 +3118,7 @@
       <p:grpSpPr/>
       <p:pic>
         <p:nvPicPr>
-          <p:cNvPr id="2" name="Picture 1" descr="chaayos_logo_1_20250904_020014_b8411bb2.png"/>
+          <p:cNvPr id="2" name="Picture 1" descr="chaayos_logo_1_20250904_022851_3cb662a1.png"/>
           <p:cNvPicPr>
             <a:picLocks noChangeAspect="1"/>
           </p:cNvPicPr>
@@ -3201,7 +3202,7 @@
                 <a:solidFill>
                   <a:srgbClr val="059669"/>
                 </a:solidFill>
-                <a:latin typeface="Source Sans Pro"/>
+                <a:latin typeface="Inter"/>
               </a:defRPr>
             </a:pPr>
             <a:r>
@@ -3238,7 +3239,7 @@
       <p:grpSpPr/>
       <p:pic>
         <p:nvPicPr>
-          <p:cNvPr id="2" name="Picture 1" descr="chaayos_logo_2_20250904_020042_53d8a6c4.png"/>
+          <p:cNvPr id="2" name="Picture 1" descr="chaayos_logo_2_20250904_022906_819b3c22.png"/>
           <p:cNvPicPr>
             <a:picLocks noChangeAspect="1"/>
           </p:cNvPicPr>
@@ -3290,7 +3291,7 @@
                 <a:solidFill>
                   <a:srgbClr val="000000"/>
                 </a:solidFill>
-                <a:latin typeface="Source Sans Pro"/>
+                <a:latin typeface="Inter"/>
               </a:defRPr>
             </a:pPr>
             <a:r>
@@ -3361,7 +3362,7 @@
                 <a:solidFill>
                   <a:srgbClr val="059669"/>
                 </a:solidFill>
-                <a:latin typeface="Inter"/>
+                <a:latin typeface="Source Sans Pro"/>
               </a:defRPr>
             </a:pPr>
             <a:r>
@@ -3398,7 +3399,7 @@
       <p:grpSpPr/>
       <p:pic>
         <p:nvPicPr>
-          <p:cNvPr id="2" name="Picture 1" descr="chaayos_logo_3_20250904_020106_18ec959b.png"/>
+          <p:cNvPr id="2" name="Picture 1" descr="chaayos_logo_3_20250904_022920_c3bf13fe.png"/>
           <p:cNvPicPr>
             <a:picLocks noChangeAspect="1"/>
           </p:cNvPicPr>
@@ -3450,7 +3451,7 @@
                 <a:solidFill>
                   <a:srgbClr val="000000"/>
                 </a:solidFill>
-                <a:latin typeface="Source Sans Pro"/>
+                <a:latin typeface="Inter"/>
               </a:defRPr>
             </a:pPr>
             <a:r>
@@ -3521,7 +3522,7 @@
                 <a:solidFill>
                   <a:srgbClr val="059669"/>
                 </a:solidFill>
-                <a:latin typeface="Inter"/>
+                <a:latin typeface="Source Sans Pro"/>
               </a:defRPr>
             </a:pPr>
             <a:r>
@@ -3631,7 +3632,7 @@
                 <a:solidFill>
                   <a:srgbClr val="000000"/>
                 </a:solidFill>
-                <a:latin typeface="Source Sans Pro"/>
+                <a:latin typeface="Inter"/>
               </a:defRPr>
             </a:pPr>
             <a:r>
@@ -3647,7 +3648,7 @@
                 <a:solidFill>
                   <a:srgbClr val="000000"/>
                 </a:solidFill>
-                <a:latin typeface="Source Sans Pro"/>
+                <a:latin typeface="Inter"/>
               </a:defRPr>
             </a:pPr>
             <a:r>
@@ -3663,7 +3664,7 @@
                 <a:solidFill>
                   <a:srgbClr val="000000"/>
                 </a:solidFill>
-                <a:latin typeface="Source Sans Pro"/>
+                <a:latin typeface="Inter"/>
               </a:defRPr>
             </a:pPr>
             <a:r>
@@ -3679,7 +3680,7 @@
                 <a:solidFill>
                   <a:srgbClr val="000000"/>
                 </a:solidFill>
-                <a:latin typeface="Source Sans Pro"/>
+                <a:latin typeface="Inter"/>
               </a:defRPr>
             </a:pPr>
             <a:r>
@@ -3695,7 +3696,7 @@
                 <a:solidFill>
                   <a:srgbClr val="000000"/>
                 </a:solidFill>
-                <a:latin typeface="Source Sans Pro"/>
+                <a:latin typeface="Inter"/>
               </a:defRPr>
             </a:pPr>
             <a:r>
@@ -3779,7 +3780,7 @@
                 <a:solidFill>
                   <a:srgbClr val="000000"/>
                 </a:solidFill>
-                <a:latin typeface="Source Sans Pro"/>
+                <a:latin typeface="Inter"/>
               </a:defRPr>
             </a:pPr>
             <a:r>
@@ -3795,7 +3796,7 @@
                 <a:solidFill>
                   <a:srgbClr val="000000"/>
                 </a:solidFill>
-                <a:latin typeface="Source Sans Pro"/>
+                <a:latin typeface="Inter"/>
               </a:defRPr>
             </a:pPr>
             <a:r>
@@ -3811,7 +3812,7 @@
                 <a:solidFill>
                   <a:srgbClr val="000000"/>
                 </a:solidFill>
-                <a:latin typeface="Source Sans Pro"/>
+                <a:latin typeface="Inter"/>
               </a:defRPr>
             </a:pPr>
             <a:r>
@@ -3827,7 +3828,7 @@
                 <a:solidFill>
                   <a:srgbClr val="000000"/>
                 </a:solidFill>
-                <a:latin typeface="Source Sans Pro"/>
+                <a:latin typeface="Inter"/>
               </a:defRPr>
             </a:pPr>
             <a:r>
@@ -3843,7 +3844,7 @@
                 <a:solidFill>
                   <a:srgbClr val="000000"/>
                 </a:solidFill>
-                <a:latin typeface="Source Sans Pro"/>
+                <a:latin typeface="Inter"/>
               </a:defRPr>
             </a:pPr>
             <a:r>
@@ -3927,7 +3928,7 @@
                 <a:solidFill>
                   <a:srgbClr val="000000"/>
                 </a:solidFill>
-                <a:latin typeface="Source Sans Pro"/>
+                <a:latin typeface="Inter"/>
               </a:defRPr>
             </a:pPr>
             <a:r>
@@ -3943,7 +3944,7 @@
                 <a:solidFill>
                   <a:srgbClr val="000000"/>
                 </a:solidFill>
-                <a:latin typeface="Source Sans Pro"/>
+                <a:latin typeface="Inter"/>
               </a:defRPr>
             </a:pPr>
             <a:r>
@@ -3959,7 +3960,7 @@
                 <a:solidFill>
                   <a:srgbClr val="000000"/>
                 </a:solidFill>
-                <a:latin typeface="Source Sans Pro"/>
+                <a:latin typeface="Inter"/>
               </a:defRPr>
             </a:pPr>
             <a:r>
@@ -3975,7 +3976,7 @@
                 <a:solidFill>
                   <a:srgbClr val="000000"/>
                 </a:solidFill>
-                <a:latin typeface="Source Sans Pro"/>
+                <a:latin typeface="Inter"/>
               </a:defRPr>
             </a:pPr>
             <a:r>
@@ -3991,7 +3992,7 @@
                 <a:solidFill>
                   <a:srgbClr val="000000"/>
                 </a:solidFill>
-                <a:latin typeface="Source Sans Pro"/>
+                <a:latin typeface="Inter"/>
               </a:defRPr>
             </a:pPr>
             <a:r>
@@ -4075,7 +4076,7 @@
                 <a:solidFill>
                   <a:srgbClr val="000000"/>
                 </a:solidFill>
-                <a:latin typeface="Source Sans Pro"/>
+                <a:latin typeface="Inter"/>
               </a:defRPr>
             </a:pPr>
             <a:r>
@@ -4091,7 +4092,7 @@
                 <a:solidFill>
                   <a:srgbClr val="000000"/>
                 </a:solidFill>
-                <a:latin typeface="Source Sans Pro"/>
+                <a:latin typeface="Inter"/>
               </a:defRPr>
             </a:pPr>
             <a:r>
@@ -4107,7 +4108,7 @@
                 <a:solidFill>
                   <a:srgbClr val="000000"/>
                 </a:solidFill>
-                <a:latin typeface="Source Sans Pro"/>
+                <a:latin typeface="Inter"/>
               </a:defRPr>
             </a:pPr>
             <a:r>
@@ -4123,7 +4124,7 @@
                 <a:solidFill>
                   <a:srgbClr val="000000"/>
                 </a:solidFill>
-                <a:latin typeface="Source Sans Pro"/>
+                <a:latin typeface="Inter"/>
               </a:defRPr>
             </a:pPr>
             <a:r>
@@ -4139,7 +4140,7 @@
                 <a:solidFill>
                   <a:srgbClr val="000000"/>
                 </a:solidFill>
-                <a:latin typeface="Source Sans Pro"/>
+                <a:latin typeface="Inter"/>
               </a:defRPr>
             </a:pPr>
             <a:r>
@@ -4210,7 +4211,7 @@
                 <a:solidFill>
                   <a:srgbClr val="059669"/>
                 </a:solidFill>
-                <a:latin typeface="Inter"/>
+                <a:latin typeface="Source Sans Pro"/>
               </a:defRPr>
             </a:pPr>
             <a:r>
@@ -4260,7 +4261,7 @@
             <a:avLst/>
           </a:prstGeom>
           <a:solidFill>
-            <a:srgbClr val="F8F9FA"/>
+            <a:srgbClr val="8AE1D0"/>
           </a:solidFill>
           <a:ln w="25400">
             <a:solidFill>
@@ -4320,11 +4321,11 @@
                 <a:solidFill>
                   <a:srgbClr val="000000"/>
                 </a:solidFill>
-                <a:latin typeface="Source Sans Pro"/>
-              </a:defRPr>
-            </a:pPr>
-            <a:r>
-              <a:t>Light Background</a:t>
+                <a:latin typeface="Inter"/>
+              </a:defRPr>
+            </a:pPr>
+            <a:r>
+              <a:t>Light Mint</a:t>
             </a:r>
           </a:p>
           <a:p>
@@ -4336,11 +4337,11 @@
                 <a:solidFill>
                   <a:srgbClr val="000000"/>
                 </a:solidFill>
-                <a:latin typeface="Source Sans Pro"/>
-              </a:defRPr>
-            </a:pPr>
-            <a:r>
-              <a:t>#F8F9FA</a:t>
+                <a:latin typeface="Inter"/>
+              </a:defRPr>
+            </a:pPr>
+            <a:r>
+              <a:t>#8AE1D0</a:t>
             </a:r>
           </a:p>
           <a:p>
@@ -4352,7 +4353,7 @@
                 <a:solidFill>
                   <a:srgbClr val="000000"/>
                 </a:solidFill>
-                <a:latin typeface="Source Sans Pro"/>
+                <a:latin typeface="Inter"/>
               </a:defRPr>
             </a:pPr>
             <a:r>
@@ -4376,7 +4377,7 @@
             <a:avLst/>
           </a:prstGeom>
           <a:solidFill>
-            <a:srgbClr val="6B7280"/>
+            <a:srgbClr val="0F7267"/>
           </a:solidFill>
           <a:ln w="25400">
             <a:solidFill>
@@ -4436,11 +4437,11 @@
                 <a:solidFill>
                   <a:srgbClr val="000000"/>
                 </a:solidFill>
-                <a:latin typeface="Source Sans Pro"/>
-              </a:defRPr>
-            </a:pPr>
-            <a:r>
-              <a:t>Medium Gray</a:t>
+                <a:latin typeface="Inter"/>
+              </a:defRPr>
+            </a:pPr>
+            <a:r>
+              <a:t>Dark Teal</a:t>
             </a:r>
           </a:p>
           <a:p>
@@ -4452,11 +4453,11 @@
                 <a:solidFill>
                   <a:srgbClr val="000000"/>
                 </a:solidFill>
-                <a:latin typeface="Source Sans Pro"/>
-              </a:defRPr>
-            </a:pPr>
-            <a:r>
-              <a:t>#6B7280</a:t>
+                <a:latin typeface="Inter"/>
+              </a:defRPr>
+            </a:pPr>
+            <a:r>
+              <a:t>#0F7267</a:t>
             </a:r>
           </a:p>
           <a:p>
@@ -4468,7 +4469,7 @@
                 <a:solidFill>
                   <a:srgbClr val="000000"/>
                 </a:solidFill>
-                <a:latin typeface="Source Sans Pro"/>
+                <a:latin typeface="Inter"/>
               </a:defRPr>
             </a:pPr>
             <a:r>
@@ -4492,7 +4493,7 @@
             <a:avLst/>
           </a:prstGeom>
           <a:solidFill>
-            <a:srgbClr val="1F2937"/>
+            <a:srgbClr val="FFA69E"/>
           </a:solidFill>
           <a:ln w="25400">
             <a:solidFill>
@@ -4552,11 +4553,11 @@
                 <a:solidFill>
                   <a:srgbClr val="000000"/>
                 </a:solidFill>
-                <a:latin typeface="Source Sans Pro"/>
-              </a:defRPr>
-            </a:pPr>
-            <a:r>
-              <a:t>Dark Text</a:t>
+                <a:latin typeface="Inter"/>
+              </a:defRPr>
+            </a:pPr>
+            <a:r>
+              <a:t>Soft Coral</a:t>
             </a:r>
           </a:p>
           <a:p>
@@ -4568,11 +4569,11 @@
                 <a:solidFill>
                   <a:srgbClr val="000000"/>
                 </a:solidFill>
-                <a:latin typeface="Source Sans Pro"/>
-              </a:defRPr>
-            </a:pPr>
-            <a:r>
-              <a:t>#1F2937</a:t>
+                <a:latin typeface="Inter"/>
+              </a:defRPr>
+            </a:pPr>
+            <a:r>
+              <a:t>#FFA69E</a:t>
             </a:r>
           </a:p>
           <a:p>
@@ -4584,11 +4585,11 @@
                 <a:solidFill>
                   <a:srgbClr val="000000"/>
                 </a:solidFill>
-                <a:latin typeface="Source Sans Pro"/>
-              </a:defRPr>
-            </a:pPr>
-            <a:r>
-              <a:t>Use Light Text</a:t>
+                <a:latin typeface="Inter"/>
+              </a:defRPr>
+            </a:pPr>
+            <a:r>
+              <a:t>Use Dark Text</a:t>
             </a:r>
           </a:p>
         </p:txBody>
@@ -4608,7 +4609,7 @@
             <a:avLst/>
           </a:prstGeom>
           <a:solidFill>
-            <a:srgbClr val="E5E7EB"/>
+            <a:srgbClr val="B3A0C9"/>
           </a:solidFill>
           <a:ln w="25400">
             <a:solidFill>
@@ -4668,11 +4669,11 @@
                 <a:solidFill>
                   <a:srgbClr val="000000"/>
                 </a:solidFill>
-                <a:latin typeface="Source Sans Pro"/>
-              </a:defRPr>
-            </a:pPr>
-            <a:r>
-              <a:t>Accent Light</a:t>
+                <a:latin typeface="Inter"/>
+              </a:defRPr>
+            </a:pPr>
+            <a:r>
+              <a:t>Light Lavender</a:t>
             </a:r>
           </a:p>
           <a:p>
@@ -4684,11 +4685,11 @@
                 <a:solidFill>
                   <a:srgbClr val="000000"/>
                 </a:solidFill>
-                <a:latin typeface="Source Sans Pro"/>
-              </a:defRPr>
-            </a:pPr>
-            <a:r>
-              <a:t>#E5E7EB</a:t>
+                <a:latin typeface="Inter"/>
+              </a:defRPr>
+            </a:pPr>
+            <a:r>
+              <a:t>#B3A0C9</a:t>
             </a:r>
           </a:p>
           <a:p>
@@ -4700,7 +4701,7 @@
                 <a:solidFill>
                   <a:srgbClr val="000000"/>
                 </a:solidFill>
-                <a:latin typeface="Source Sans Pro"/>
+                <a:latin typeface="Inter"/>
               </a:defRPr>
             </a:pPr>
             <a:r>
@@ -4724,7 +4725,7 @@
             <a:avLst/>
           </a:prstGeom>
           <a:solidFill>
-            <a:srgbClr val="F59E0B"/>
+            <a:srgbClr val="333333"/>
           </a:solidFill>
           <a:ln w="25400">
             <a:solidFill>
@@ -4784,11 +4785,11 @@
                 <a:solidFill>
                   <a:srgbClr val="000000"/>
                 </a:solidFill>
-                <a:latin typeface="Source Sans Pro"/>
-              </a:defRPr>
-            </a:pPr>
-            <a:r>
-              <a:t>Warning Orange</a:t>
+                <a:latin typeface="Inter"/>
+              </a:defRPr>
+            </a:pPr>
+            <a:r>
+              <a:t>Charcoal</a:t>
             </a:r>
           </a:p>
           <a:p>
@@ -4800,11 +4801,11 @@
                 <a:solidFill>
                   <a:srgbClr val="000000"/>
                 </a:solidFill>
-                <a:latin typeface="Source Sans Pro"/>
-              </a:defRPr>
-            </a:pPr>
-            <a:r>
-              <a:t>#F59E0B</a:t>
+                <a:latin typeface="Inter"/>
+              </a:defRPr>
+            </a:pPr>
+            <a:r>
+              <a:t>#333333</a:t>
             </a:r>
           </a:p>
           <a:p>
@@ -4816,11 +4817,11 @@
                 <a:solidFill>
                   <a:srgbClr val="000000"/>
                 </a:solidFill>
-                <a:latin typeface="Source Sans Pro"/>
-              </a:defRPr>
-            </a:pPr>
-            <a:r>
-              <a:t>Use Dark Text</a:t>
+                <a:latin typeface="Inter"/>
+              </a:defRPr>
+            </a:pPr>
+            <a:r>
+              <a:t>Use Light Text</a:t>
             </a:r>
           </a:p>
         </p:txBody>
@@ -4887,7 +4888,7 @@
                 <a:solidFill>
                   <a:srgbClr val="059669"/>
                 </a:solidFill>
-                <a:latin typeface="Inter"/>
+                <a:latin typeface="Source Sans Pro"/>
               </a:defRPr>
             </a:pPr>
             <a:r>
@@ -4952,7 +4953,7 @@
                 <a:solidFill>
                   <a:srgbClr val="000000"/>
                 </a:solidFill>
-                <a:latin typeface="Source Sans Pro"/>
+                <a:latin typeface="Inter"/>
               </a:defRPr>
             </a:pPr>
             <a:r>
@@ -4968,7 +4969,7 @@
                 <a:solidFill>
                   <a:srgbClr val="000000"/>
                 </a:solidFill>
-                <a:latin typeface="Source Sans Pro"/>
+                <a:latin typeface="Inter"/>
               </a:defRPr>
             </a:pPr>
           </a:p>
@@ -4981,7 +4982,7 @@
                 <a:solidFill>
                   <a:srgbClr val="000000"/>
                 </a:solidFill>
-                <a:latin typeface="Source Sans Pro"/>
+                <a:latin typeface="Inter"/>
               </a:defRPr>
             </a:pPr>
             <a:r>
@@ -4997,7 +4998,7 @@
                 <a:solidFill>
                   <a:srgbClr val="000000"/>
                 </a:solidFill>
-                <a:latin typeface="Source Sans Pro"/>
+                <a:latin typeface="Inter"/>
               </a:defRPr>
             </a:pPr>
             <a:r>
@@ -5013,7 +5014,7 @@
                 <a:solidFill>
                   <a:srgbClr val="000000"/>
                 </a:solidFill>
-                <a:latin typeface="Source Sans Pro"/>
+                <a:latin typeface="Inter"/>
               </a:defRPr>
             </a:pPr>
             <a:r>
@@ -5029,7 +5030,7 @@
                 <a:solidFill>
                   <a:srgbClr val="000000"/>
                 </a:solidFill>
-                <a:latin typeface="Source Sans Pro"/>
+                <a:latin typeface="Inter"/>
               </a:defRPr>
             </a:pPr>
             <a:r>
@@ -5045,7 +5046,7 @@
                 <a:solidFill>
                   <a:srgbClr val="000000"/>
                 </a:solidFill>
-                <a:latin typeface="Source Sans Pro"/>
+                <a:latin typeface="Inter"/>
               </a:defRPr>
             </a:pPr>
             <a:r>
@@ -5061,7 +5062,7 @@
                 <a:solidFill>
                   <a:srgbClr val="000000"/>
                 </a:solidFill>
-                <a:latin typeface="Source Sans Pro"/>
+                <a:latin typeface="Inter"/>
               </a:defRPr>
             </a:pPr>
           </a:p>
@@ -5074,7 +5075,7 @@
                 <a:solidFill>
                   <a:srgbClr val="000000"/>
                 </a:solidFill>
-                <a:latin typeface="Source Sans Pro"/>
+                <a:latin typeface="Inter"/>
               </a:defRPr>
             </a:pPr>
             <a:r>
@@ -5090,7 +5091,7 @@
                 <a:solidFill>
                   <a:srgbClr val="000000"/>
                 </a:solidFill>
-                <a:latin typeface="Source Sans Pro"/>
+                <a:latin typeface="Inter"/>
               </a:defRPr>
             </a:pPr>
           </a:p>
@@ -5103,7 +5104,7 @@
                 <a:solidFill>
                   <a:srgbClr val="000000"/>
                 </a:solidFill>
-                <a:latin typeface="Source Sans Pro"/>
+                <a:latin typeface="Inter"/>
               </a:defRPr>
             </a:pPr>
             <a:r>
@@ -5119,7 +5120,7 @@
                 <a:solidFill>
                   <a:srgbClr val="000000"/>
                 </a:solidFill>
-                <a:latin typeface="Source Sans Pro"/>
+                <a:latin typeface="Inter"/>
               </a:defRPr>
             </a:pPr>
             <a:r>
@@ -5135,7 +5136,7 @@
                 <a:solidFill>
                   <a:srgbClr val="000000"/>
                 </a:solidFill>
-                <a:latin typeface="Source Sans Pro"/>
+                <a:latin typeface="Inter"/>
               </a:defRPr>
             </a:pPr>
             <a:r>
@@ -5151,7 +5152,7 @@
                 <a:solidFill>
                   <a:srgbClr val="000000"/>
                 </a:solidFill>
-                <a:latin typeface="Source Sans Pro"/>
+                <a:latin typeface="Inter"/>
               </a:defRPr>
             </a:pPr>
             <a:r>
@@ -5167,7 +5168,7 @@
                 <a:solidFill>
                   <a:srgbClr val="000000"/>
                 </a:solidFill>
-                <a:latin typeface="Source Sans Pro"/>
+                <a:latin typeface="Inter"/>
               </a:defRPr>
             </a:pPr>
             <a:r>
@@ -5238,7 +5239,7 @@
                 <a:solidFill>
                   <a:srgbClr val="059669"/>
                 </a:solidFill>
-                <a:latin typeface="Inter"/>
+                <a:latin typeface="Source Sans Pro"/>
               </a:defRPr>
             </a:pPr>
             <a:r>
@@ -5303,7 +5304,7 @@
                 <a:solidFill>
                   <a:srgbClr val="000000"/>
                 </a:solidFill>
-                <a:latin typeface="Source Sans Pro"/>
+                <a:latin typeface="Inter"/>
               </a:defRPr>
             </a:pPr>
             <a:r>
@@ -5319,7 +5320,7 @@
                 <a:solidFill>
                   <a:srgbClr val="000000"/>
                 </a:solidFill>
-                <a:latin typeface="Source Sans Pro"/>
+                <a:latin typeface="Inter"/>
               </a:defRPr>
             </a:pPr>
           </a:p>
@@ -5332,7 +5333,7 @@
                 <a:solidFill>
                   <a:srgbClr val="000000"/>
                 </a:solidFill>
-                <a:latin typeface="Source Sans Pro"/>
+                <a:latin typeface="Inter"/>
               </a:defRPr>
             </a:pPr>
             <a:r>
@@ -5348,7 +5349,7 @@
                 <a:solidFill>
                   <a:srgbClr val="000000"/>
                 </a:solidFill>
-                <a:latin typeface="Source Sans Pro"/>
+                <a:latin typeface="Inter"/>
               </a:defRPr>
             </a:pPr>
             <a:r>
@@ -5364,7 +5365,7 @@
                 <a:solidFill>
                   <a:srgbClr val="000000"/>
                 </a:solidFill>
-                <a:latin typeface="Source Sans Pro"/>
+                <a:latin typeface="Inter"/>
               </a:defRPr>
             </a:pPr>
             <a:r>
@@ -5380,7 +5381,7 @@
                 <a:solidFill>
                   <a:srgbClr val="000000"/>
                 </a:solidFill>
-                <a:latin typeface="Source Sans Pro"/>
+                <a:latin typeface="Inter"/>
               </a:defRPr>
             </a:pPr>
             <a:r>
@@ -5396,7 +5397,7 @@
                 <a:solidFill>
                   <a:srgbClr val="000000"/>
                 </a:solidFill>
-                <a:latin typeface="Source Sans Pro"/>
+                <a:latin typeface="Inter"/>
               </a:defRPr>
             </a:pPr>
             <a:r>
@@ -5412,7 +5413,7 @@
                 <a:solidFill>
                   <a:srgbClr val="000000"/>
                 </a:solidFill>
-                <a:latin typeface="Source Sans Pro"/>
+                <a:latin typeface="Inter"/>
               </a:defRPr>
             </a:pPr>
           </a:p>
@@ -5425,11 +5426,11 @@
                 <a:solidFill>
                   <a:srgbClr val="000000"/>
                 </a:solidFill>
-                <a:latin typeface="Source Sans Pro"/>
-              </a:defRPr>
-            </a:pPr>
-            <a:r>
-              <a:t>Colors: Light Background, Medium Gray, Dark Text, Accent Light, Warning Orange</a:t>
+                <a:latin typeface="Inter"/>
+              </a:defRPr>
+            </a:pPr>
+            <a:r>
+              <a:t>Colors: Light Mint, Dark Teal, Soft Coral, Light Lavender, Charcoal</a:t>
             </a:r>
           </a:p>
           <a:p>
@@ -5441,7 +5442,7 @@
                 <a:solidFill>
                   <a:srgbClr val="000000"/>
                 </a:solidFill>
-                <a:latin typeface="Source Sans Pro"/>
+                <a:latin typeface="Inter"/>
               </a:defRPr>
             </a:pPr>
           </a:p>
@@ -5454,7 +5455,7 @@
                 <a:solidFill>
                   <a:srgbClr val="000000"/>
                 </a:solidFill>
-                <a:latin typeface="Source Sans Pro"/>
+                <a:latin typeface="Inter"/>
               </a:defRPr>
             </a:pPr>
             <a:r>
@@ -5470,7 +5471,7 @@
                 <a:solidFill>
                   <a:srgbClr val="000000"/>
                 </a:solidFill>
-                <a:latin typeface="Source Sans Pro"/>
+                <a:latin typeface="Inter"/>
               </a:defRPr>
             </a:pPr>
             <a:r>
@@ -5486,7 +5487,7 @@
                 <a:solidFill>
                   <a:srgbClr val="000000"/>
                 </a:solidFill>
-                <a:latin typeface="Source Sans Pro"/>
+                <a:latin typeface="Inter"/>
               </a:defRPr>
             </a:pPr>
             <a:r>
@@ -5502,7 +5503,7 @@
                 <a:solidFill>
                   <a:srgbClr val="000000"/>
                 </a:solidFill>
-                <a:latin typeface="Source Sans Pro"/>
+                <a:latin typeface="Inter"/>
               </a:defRPr>
             </a:pPr>
             <a:r>
@@ -5518,7 +5519,7 @@
                 <a:solidFill>
                   <a:srgbClr val="000000"/>
                 </a:solidFill>
-                <a:latin typeface="Source Sans Pro"/>
+                <a:latin typeface="Inter"/>
               </a:defRPr>
             </a:pPr>
             <a:r>
@@ -5589,7 +5590,7 @@
                 <a:solidFill>
                   <a:srgbClr val="059669"/>
                 </a:solidFill>
-                <a:latin typeface="Inter"/>
+                <a:latin typeface="Source Sans Pro"/>
               </a:defRPr>
             </a:pPr>
             <a:r>
@@ -5654,11 +5655,11 @@
                 <a:solidFill>
                   <a:srgbClr val="000000"/>
                 </a:solidFill>
-                <a:latin typeface="Source Sans Pro"/>
-              </a:defRPr>
-            </a:pPr>
-            <a:r>
-              <a:t>Primary Font: Inter</a:t>
+                <a:latin typeface="Inter"/>
+              </a:defRPr>
+            </a:pPr>
+            <a:r>
+              <a:t>Primary Font: Source Sans Pro</a:t>
             </a:r>
           </a:p>
           <a:p>
@@ -5670,7 +5671,7 @@
                 <a:solidFill>
                   <a:srgbClr val="000000"/>
                 </a:solidFill>
-                <a:latin typeface="Source Sans Pro"/>
+                <a:latin typeface="Inter"/>
               </a:defRPr>
             </a:pPr>
           </a:p>
@@ -5683,11 +5684,11 @@
                 <a:solidFill>
                   <a:srgbClr val="000000"/>
                 </a:solidFill>
-                <a:latin typeface="Source Sans Pro"/>
-              </a:defRPr>
-            </a:pPr>
-            <a:r>
-              <a:t>Secondary Font: Source Sans Pro</a:t>
+                <a:latin typeface="Inter"/>
+              </a:defRPr>
+            </a:pPr>
+            <a:r>
+              <a:t>Secondary Font: Inter</a:t>
             </a:r>
           </a:p>
           <a:p>
@@ -5699,7 +5700,7 @@
                 <a:solidFill>
                   <a:srgbClr val="000000"/>
                 </a:solidFill>
-                <a:latin typeface="Source Sans Pro"/>
+                <a:latin typeface="Inter"/>
               </a:defRPr>
             </a:pPr>
           </a:p>
@@ -5712,7 +5713,7 @@
                 <a:solidFill>
                   <a:srgbClr val="000000"/>
                 </a:solidFill>
-                <a:latin typeface="Source Sans Pro"/>
+                <a:latin typeface="Inter"/>
               </a:defRPr>
             </a:pPr>
             <a:r>
@@ -5728,11 +5729,11 @@
                 <a:solidFill>
                   <a:srgbClr val="000000"/>
                 </a:solidFill>
-                <a:latin typeface="Source Sans Pro"/>
-              </a:defRPr>
-            </a:pPr>
-            <a:r>
-              <a:t>• Headlines: Inter - Bold, 28-32pt</a:t>
+                <a:latin typeface="Inter"/>
+              </a:defRPr>
+            </a:pPr>
+            <a:r>
+              <a:t>• Headlines: Source Sans Pro - Bold, 28-32pt</a:t>
             </a:r>
           </a:p>
           <a:p>
@@ -5744,11 +5745,11 @@
                 <a:solidFill>
                   <a:srgbClr val="000000"/>
                 </a:solidFill>
-                <a:latin typeface="Source Sans Pro"/>
-              </a:defRPr>
-            </a:pPr>
-            <a:r>
-              <a:t>• Subheadlines: Inter - Bold, 20-24pt</a:t>
+                <a:latin typeface="Inter"/>
+              </a:defRPr>
+            </a:pPr>
+            <a:r>
+              <a:t>• Subheadlines: Source Sans Pro - Bold, 20-24pt</a:t>
             </a:r>
           </a:p>
           <a:p>
@@ -5760,11 +5761,11 @@
                 <a:solidFill>
                   <a:srgbClr val="000000"/>
                 </a:solidFill>
-                <a:latin typeface="Source Sans Pro"/>
-              </a:defRPr>
-            </a:pPr>
-            <a:r>
-              <a:t>• Body Text: Source Sans Pro - Regular, 16-18pt</a:t>
+                <a:latin typeface="Inter"/>
+              </a:defRPr>
+            </a:pPr>
+            <a:r>
+              <a:t>• Body Text: Inter - Regular, 16-18pt</a:t>
             </a:r>
           </a:p>
           <a:p>
@@ -5776,11 +5777,11 @@
                 <a:solidFill>
                   <a:srgbClr val="000000"/>
                 </a:solidFill>
-                <a:latin typeface="Source Sans Pro"/>
-              </a:defRPr>
-            </a:pPr>
-            <a:r>
-              <a:t>• Caption Text: Source Sans Pro - Regular, 12-14pt</a:t>
+                <a:latin typeface="Inter"/>
+              </a:defRPr>
+            </a:pPr>
+            <a:r>
+              <a:t>• Caption Text: Inter - Regular, 12-14pt</a:t>
             </a:r>
           </a:p>
         </p:txBody>
@@ -5847,7 +5848,7 @@
                 <a:solidFill>
                   <a:srgbClr val="059669"/>
                 </a:solidFill>
-                <a:latin typeface="Inter"/>
+                <a:latin typeface="Source Sans Pro"/>
               </a:defRPr>
             </a:pPr>
             <a:r>
@@ -5912,7 +5913,7 @@
                 <a:solidFill>
                   <a:srgbClr val="000000"/>
                 </a:solidFill>
-                <a:latin typeface="Source Sans Pro"/>
+                <a:latin typeface="Inter"/>
               </a:defRPr>
             </a:pPr>
             <a:r>
@@ -6319,7 +6320,7 @@
                 <a:solidFill>
                   <a:srgbClr val="059669"/>
                 </a:solidFill>
-                <a:latin typeface="Inter"/>
+                <a:latin typeface="Source Sans Pro"/>
               </a:defRPr>
             </a:pPr>
             <a:r>
@@ -6384,7 +6385,7 @@
                 <a:solidFill>
                   <a:srgbClr val="000000"/>
                 </a:solidFill>
-                <a:latin typeface="Source Sans Pro"/>
+                <a:latin typeface="Inter"/>
               </a:defRPr>
             </a:pPr>
             <a:r>
@@ -6743,7 +6744,7 @@
                 <a:solidFill>
                   <a:srgbClr val="059669"/>
                 </a:solidFill>
-                <a:latin typeface="Inter"/>
+                <a:latin typeface="Source Sans Pro"/>
               </a:defRPr>
             </a:pPr>
             <a:r>
@@ -6808,7 +6809,7 @@
                 <a:solidFill>
                   <a:srgbClr val="000000"/>
                 </a:solidFill>
-                <a:latin typeface="Source Sans Pro"/>
+                <a:latin typeface="Inter"/>
               </a:defRPr>
             </a:pPr>
             <a:r>
@@ -6824,7 +6825,7 @@
                 <a:solidFill>
                   <a:srgbClr val="000000"/>
                 </a:solidFill>
-                <a:latin typeface="Source Sans Pro"/>
+                <a:latin typeface="Inter"/>
               </a:defRPr>
             </a:pPr>
             <a:r>
@@ -6840,7 +6841,7 @@
                 <a:solidFill>
                   <a:srgbClr val="000000"/>
                 </a:solidFill>
-                <a:latin typeface="Source Sans Pro"/>
+                <a:latin typeface="Inter"/>
               </a:defRPr>
             </a:pPr>
           </a:p>
@@ -6853,7 +6854,7 @@
                 <a:solidFill>
                   <a:srgbClr val="000000"/>
                 </a:solidFill>
-                <a:latin typeface="Source Sans Pro"/>
+                <a:latin typeface="Inter"/>
               </a:defRPr>
             </a:pPr>
             <a:r>
@@ -6869,7 +6870,7 @@
                 <a:solidFill>
                   <a:srgbClr val="000000"/>
                 </a:solidFill>
-                <a:latin typeface="Source Sans Pro"/>
+                <a:latin typeface="Inter"/>
               </a:defRPr>
             </a:pPr>
             <a:r>
@@ -6885,7 +6886,7 @@
                 <a:solidFill>
                   <a:srgbClr val="000000"/>
                 </a:solidFill>
-                <a:latin typeface="Source Sans Pro"/>
+                <a:latin typeface="Inter"/>
               </a:defRPr>
             </a:pPr>
             <a:r>
@@ -6901,7 +6902,7 @@
                 <a:solidFill>
                   <a:srgbClr val="000000"/>
                 </a:solidFill>
-                <a:latin typeface="Source Sans Pro"/>
+                <a:latin typeface="Inter"/>
               </a:defRPr>
             </a:pPr>
           </a:p>
@@ -6914,7 +6915,7 @@
                 <a:solidFill>
                   <a:srgbClr val="000000"/>
                 </a:solidFill>
-                <a:latin typeface="Source Sans Pro"/>
+                <a:latin typeface="Inter"/>
               </a:defRPr>
             </a:pPr>
             <a:r>
@@ -6930,7 +6931,7 @@
                 <a:solidFill>
                   <a:srgbClr val="000000"/>
                 </a:solidFill>
-                <a:latin typeface="Source Sans Pro"/>
+                <a:latin typeface="Inter"/>
               </a:defRPr>
             </a:pPr>
             <a:r>
@@ -6946,7 +6947,7 @@
                 <a:solidFill>
                   <a:srgbClr val="000000"/>
                 </a:solidFill>
-                <a:latin typeface="Source Sans Pro"/>
+                <a:latin typeface="Inter"/>
               </a:defRPr>
             </a:pPr>
             <a:r>
@@ -7017,7 +7018,7 @@
                 <a:solidFill>
                   <a:srgbClr val="059669"/>
                 </a:solidFill>
-                <a:latin typeface="Inter"/>
+                <a:latin typeface="Source Sans Pro"/>
               </a:defRPr>
             </a:pPr>
             <a:r>
@@ -7079,7 +7080,7 @@
                 <a:solidFill>
                   <a:srgbClr val="059669"/>
                 </a:solidFill>
-                <a:latin typeface="Inter"/>
+                <a:latin typeface="Source Sans Pro"/>
               </a:defRPr>
             </a:pPr>
             <a:r>
@@ -7150,7 +7151,7 @@
                 <a:solidFill>
                   <a:srgbClr val="000000"/>
                 </a:solidFill>
-                <a:latin typeface="Source Sans Pro"/>
+                <a:latin typeface="Inter"/>
               </a:defRPr>
             </a:pPr>
             <a:r>
@@ -7221,7 +7222,7 @@
                 <a:solidFill>
                   <a:srgbClr val="059669"/>
                 </a:solidFill>
-                <a:latin typeface="Source Sans Pro"/>
+                <a:latin typeface="Inter"/>
               </a:defRPr>
             </a:pPr>
             <a:r>
@@ -7257,7 +7258,7 @@
                 <a:solidFill>
                   <a:srgbClr val="000000"/>
                 </a:solidFill>
-                <a:latin typeface="Source Sans Pro"/>
+                <a:latin typeface="Inter"/>
               </a:defRPr>
             </a:pPr>
             <a:r>
@@ -7328,7 +7329,7 @@
                 <a:solidFill>
                   <a:srgbClr val="059669"/>
                 </a:solidFill>
-                <a:latin typeface="Source Sans Pro"/>
+                <a:latin typeface="Inter"/>
               </a:defRPr>
             </a:pPr>
             <a:r>
@@ -7364,7 +7365,7 @@
                 <a:solidFill>
                   <a:srgbClr val="000000"/>
                 </a:solidFill>
-                <a:latin typeface="Source Sans Pro"/>
+                <a:latin typeface="Inter"/>
               </a:defRPr>
             </a:pPr>
             <a:r>
@@ -7435,7 +7436,7 @@
                 <a:solidFill>
                   <a:srgbClr val="059669"/>
                 </a:solidFill>
-                <a:latin typeface="Source Sans Pro"/>
+                <a:latin typeface="Inter"/>
               </a:defRPr>
             </a:pPr>
             <a:r>
@@ -7471,7 +7472,7 @@
                 <a:solidFill>
                   <a:srgbClr val="000000"/>
                 </a:solidFill>
-                <a:latin typeface="Source Sans Pro"/>
+                <a:latin typeface="Inter"/>
               </a:defRPr>
             </a:pPr>
             <a:r>
@@ -7542,7 +7543,7 @@
                 <a:solidFill>
                   <a:srgbClr val="059669"/>
                 </a:solidFill>
-                <a:latin typeface="Source Sans Pro"/>
+                <a:latin typeface="Inter"/>
               </a:defRPr>
             </a:pPr>
             <a:r>
@@ -7578,7 +7579,7 @@
                 <a:solidFill>
                   <a:srgbClr val="000000"/>
                 </a:solidFill>
-                <a:latin typeface="Source Sans Pro"/>
+                <a:latin typeface="Inter"/>
               </a:defRPr>
             </a:pPr>
             <a:r>
@@ -7649,7 +7650,7 @@
                 <a:solidFill>
                   <a:srgbClr val="059669"/>
                 </a:solidFill>
-                <a:latin typeface="Source Sans Pro"/>
+                <a:latin typeface="Inter"/>
               </a:defRPr>
             </a:pPr>
             <a:r>
@@ -7685,7 +7686,7 @@
                 <a:solidFill>
                   <a:srgbClr val="000000"/>
                 </a:solidFill>
-                <a:latin typeface="Source Sans Pro"/>
+                <a:latin typeface="Inter"/>
               </a:defRPr>
             </a:pPr>
             <a:r>
@@ -7756,7 +7757,7 @@
                 <a:solidFill>
                   <a:srgbClr val="059669"/>
                 </a:solidFill>
-                <a:latin typeface="Source Sans Pro"/>
+                <a:latin typeface="Inter"/>
               </a:defRPr>
             </a:pPr>
             <a:r>
@@ -7792,7 +7793,7 @@
                 <a:solidFill>
                   <a:srgbClr val="666666"/>
                 </a:solidFill>
-                <a:latin typeface="Source Sans Pro"/>
+                <a:latin typeface="Inter"/>
               </a:defRPr>
             </a:pPr>
             <a:r>
@@ -7828,7 +7829,7 @@
                 <a:solidFill>
                   <a:srgbClr val="666666"/>
                 </a:solidFill>
-                <a:latin typeface="Source Sans Pro"/>
+                <a:latin typeface="Inter"/>
               </a:defRPr>
             </a:pPr>
             <a:r>
@@ -7864,7 +7865,7 @@
                 <a:solidFill>
                   <a:srgbClr val="666666"/>
                 </a:solidFill>
-                <a:latin typeface="Source Sans Pro"/>
+                <a:latin typeface="Inter"/>
               </a:defRPr>
             </a:pPr>
             <a:r>
@@ -7900,7 +7901,7 @@
                 <a:solidFill>
                   <a:srgbClr val="000000"/>
                 </a:solidFill>
-                <a:latin typeface="Source Sans Pro"/>
+                <a:latin typeface="Inter"/>
               </a:defRPr>
             </a:pPr>
             <a:r>
@@ -7971,7 +7972,7 @@
                 <a:solidFill>
                   <a:srgbClr val="059669"/>
                 </a:solidFill>
-                <a:latin typeface="Source Sans Pro"/>
+                <a:latin typeface="Inter"/>
               </a:defRPr>
             </a:pPr>
             <a:r>
@@ -8007,7 +8008,7 @@
                 <a:solidFill>
                   <a:srgbClr val="666666"/>
                 </a:solidFill>
-                <a:latin typeface="Source Sans Pro"/>
+                <a:latin typeface="Inter"/>
               </a:defRPr>
             </a:pPr>
             <a:r>
@@ -8043,7 +8044,7 @@
                 <a:solidFill>
                   <a:srgbClr val="666666"/>
                 </a:solidFill>
-                <a:latin typeface="Source Sans Pro"/>
+                <a:latin typeface="Inter"/>
               </a:defRPr>
             </a:pPr>
             <a:r>
@@ -8079,7 +8080,7 @@
                 <a:solidFill>
                   <a:srgbClr val="666666"/>
                 </a:solidFill>
-                <a:latin typeface="Source Sans Pro"/>
+                <a:latin typeface="Inter"/>
               </a:defRPr>
             </a:pPr>
             <a:r>
@@ -8115,7 +8116,7 @@
                 <a:solidFill>
                   <a:srgbClr val="666666"/>
                 </a:solidFill>
-                <a:latin typeface="Source Sans Pro"/>
+                <a:latin typeface="Inter"/>
               </a:defRPr>
             </a:pPr>
             <a:r>
@@ -8151,7 +8152,7 @@
                 <a:solidFill>
                   <a:srgbClr val="000000"/>
                 </a:solidFill>
-                <a:latin typeface="Source Sans Pro"/>
+                <a:latin typeface="Inter"/>
               </a:defRPr>
             </a:pPr>
             <a:r>
@@ -8222,7 +8223,7 @@
                 <a:solidFill>
                   <a:srgbClr val="059669"/>
                 </a:solidFill>
-                <a:latin typeface="Source Sans Pro"/>
+                <a:latin typeface="Inter"/>
               </a:defRPr>
             </a:pPr>
             <a:r>
@@ -8258,7 +8259,7 @@
                 <a:solidFill>
                   <a:srgbClr val="666666"/>
                 </a:solidFill>
-                <a:latin typeface="Source Sans Pro"/>
+                <a:latin typeface="Inter"/>
               </a:defRPr>
             </a:pPr>
             <a:r>
@@ -8294,7 +8295,7 @@
                 <a:solidFill>
                   <a:srgbClr val="666666"/>
                 </a:solidFill>
-                <a:latin typeface="Source Sans Pro"/>
+                <a:latin typeface="Inter"/>
               </a:defRPr>
             </a:pPr>
             <a:r>
@@ -8330,7 +8331,7 @@
                 <a:solidFill>
                   <a:srgbClr val="666666"/>
                 </a:solidFill>
-                <a:latin typeface="Source Sans Pro"/>
+                <a:latin typeface="Inter"/>
               </a:defRPr>
             </a:pPr>
             <a:r>
@@ -8366,7 +8367,7 @@
                 <a:solidFill>
                   <a:srgbClr val="000000"/>
                 </a:solidFill>
-                <a:latin typeface="Source Sans Pro"/>
+                <a:latin typeface="Inter"/>
               </a:defRPr>
             </a:pPr>
             <a:r>
@@ -8437,7 +8438,7 @@
                 <a:solidFill>
                   <a:srgbClr val="059669"/>
                 </a:solidFill>
-                <a:latin typeface="Source Sans Pro"/>
+                <a:latin typeface="Inter"/>
               </a:defRPr>
             </a:pPr>
             <a:r>
@@ -8473,7 +8474,7 @@
                 <a:solidFill>
                   <a:srgbClr val="666666"/>
                 </a:solidFill>
-                <a:latin typeface="Source Sans Pro"/>
+                <a:latin typeface="Inter"/>
               </a:defRPr>
             </a:pPr>
             <a:r>
@@ -8509,7 +8510,7 @@
                 <a:solidFill>
                   <a:srgbClr val="666666"/>
                 </a:solidFill>
-                <a:latin typeface="Source Sans Pro"/>
+                <a:latin typeface="Inter"/>
               </a:defRPr>
             </a:pPr>
             <a:r>
@@ -8544,45 +8545,9 @@
         <p:nvPr/>
       </p:nvGrpSpPr>
       <p:grpSpPr/>
-      <p:sp>
-        <p:nvSpPr>
-          <p:cNvPr id="2" name="TextBox 1"/>
-          <p:cNvSpPr txBox="1"/>
-          <p:nvPr/>
-        </p:nvSpPr>
-        <p:spPr>
-          <a:xfrm>
-            <a:off x="800100" y="731520"/>
-            <a:ext cx="5486400" cy="731520"/>
-          </a:xfrm>
-          <a:prstGeom prst="rect">
-            <a:avLst/>
-          </a:prstGeom>
-          <a:noFill/>
-        </p:spPr>
-        <p:txBody>
-          <a:bodyPr wrap="none">
-            <a:spAutoFit/>
-          </a:bodyPr>
-          <a:lstStyle/>
-          <a:p>
-            <a:pPr algn="l">
-              <a:defRPr sz="2800" b="1">
-                <a:solidFill>
-                  <a:srgbClr val="000000"/>
-                </a:solidFill>
-                <a:latin typeface="Inter"/>
-              </a:defRPr>
-            </a:pPr>
-            <a:r>
-              <a:t>BRAND APPAREL</a:t>
-            </a:r>
-          </a:p>
-        </p:txBody>
-      </p:sp>
       <p:pic>
         <p:nvPicPr>
-          <p:cNvPr id="3" name="Picture 2" descr="chaayos_tshirt_white_20250904_020216_e359705d.png"/>
+          <p:cNvPr id="2" name="Picture 1" descr="chaayos_tshirt_white_20250904_023035_1c861664.png"/>
           <p:cNvPicPr>
             <a:picLocks noChangeAspect="1"/>
           </p:cNvPicPr>
@@ -8606,7 +8571,7 @@
       </p:pic>
       <p:pic>
         <p:nvPicPr>
-          <p:cNvPr id="4" name="Picture 3" descr="chaayos_tshirt_black_20250904_020225_9bdad484.png"/>
+          <p:cNvPr id="3" name="Picture 2" descr="chaayos_tshirt_black_20250904_023044_7bd0f7b9.png"/>
           <p:cNvPicPr>
             <a:picLocks noChangeAspect="1"/>
           </p:cNvPicPr>
@@ -8630,7 +8595,7 @@
       </p:pic>
       <p:pic>
         <p:nvPicPr>
-          <p:cNvPr id="5" name="Picture 4" descr="chaayos_tshirt_yellow_20250904_020237_3ca59e6a.png"/>
+          <p:cNvPr id="4" name="Picture 3" descr="chaayos_tshirt_yellow_20250904_023053_bedc7c02.png"/>
           <p:cNvPicPr>
             <a:picLocks noChangeAspect="1"/>
           </p:cNvPicPr>
@@ -8652,6 +8617,246 @@
           </a:prstGeom>
         </p:spPr>
       </p:pic>
+      <p:cxnSp>
+        <p:nvCxnSpPr>
+          <p:cNvPr id="5" name="Connector 4"/>
+          <p:cNvCxnSpPr/>
+          <p:nvPr/>
+        </p:nvCxnSpPr>
+        <p:spPr>
+          <a:xfrm>
+            <a:off x="457200" y="5286375.0"/>
+            <a:ext cx="8229600" cy="0.0"/>
+          </a:xfrm>
+          <a:prstGeom prst="line">
+            <a:avLst/>
+          </a:prstGeom>
+          <a:ln w="25400">
+            <a:solidFill>
+              <a:srgbClr val="000000"/>
+            </a:solidFill>
+          </a:ln>
+        </p:spPr>
+        <p:style>
+          <a:lnRef idx="2">
+            <a:schemeClr val="accent1"/>
+          </a:lnRef>
+          <a:fillRef idx="0">
+            <a:schemeClr val="accent1"/>
+          </a:fillRef>
+          <a:effectRef idx="1">
+            <a:schemeClr val="accent1"/>
+          </a:effectRef>
+          <a:fontRef idx="minor">
+            <a:schemeClr val="tx1"/>
+          </a:fontRef>
+        </p:style>
+      </p:cxnSp>
+      <p:sp>
+        <p:nvSpPr>
+          <p:cNvPr id="6" name="TextBox 5"/>
+          <p:cNvSpPr txBox="1"/>
+          <p:nvPr/>
+        </p:nvSpPr>
+        <p:spPr>
+          <a:xfrm>
+            <a:off x="800100" y="5560695"/>
+            <a:ext cx="5486400" cy="731520"/>
+          </a:xfrm>
+          <a:prstGeom prst="rect">
+            <a:avLst/>
+          </a:prstGeom>
+          <a:noFill/>
+        </p:spPr>
+        <p:txBody>
+          <a:bodyPr wrap="none">
+            <a:spAutoFit/>
+          </a:bodyPr>
+          <a:lstStyle/>
+          <a:p>
+            <a:pPr algn="l">
+              <a:defRPr sz="2800" b="1">
+                <a:solidFill>
+                  <a:srgbClr val="000000"/>
+                </a:solidFill>
+                <a:latin typeface="Source Sans Pro"/>
+              </a:defRPr>
+            </a:pPr>
+            <a:r>
+              <a:t>BRAND APPAREL</a:t>
+            </a:r>
+          </a:p>
+        </p:txBody>
+      </p:sp>
+    </p:spTree>
+  </p:cSld>
+  <p:clrMapOvr>
+    <a:masterClrMapping/>
+  </p:clrMapOvr>
+</p:sld>
+</file>
+
+<file path=ppt/slides/slide21.xml><?xml version="1.0" encoding="utf-8"?>
+<p:sld xmlns:a="http://schemas.openxmlformats.org/drawingml/2006/main" xmlns:p="http://schemas.openxmlformats.org/presentationml/2006/main" xmlns:r="http://schemas.openxmlformats.org/officeDocument/2006/relationships">
+  <p:cSld>
+    <p:bg>
+      <p:bgPr>
+        <a:solidFill>
+          <a:srgbClr val="FFFFFF"/>
+        </a:solidFill>
+        <a:effectLst/>
+      </p:bgPr>
+    </p:bg>
+    <p:spTree>
+      <p:nvGrpSpPr>
+        <p:cNvPr id="1" name=""/>
+        <p:cNvGrpSpPr/>
+        <p:nvPr/>
+      </p:nvGrpSpPr>
+      <p:grpSpPr/>
+      <p:pic>
+        <p:nvPicPr>
+          <p:cNvPr id="2" name="Picture 1" descr="chaayos_mug_white_20250904_023103_1ab9ddd9.png"/>
+          <p:cNvPicPr>
+            <a:picLocks noChangeAspect="1"/>
+          </p:cNvPicPr>
+          <p:nvPr/>
+        </p:nvPicPr>
+        <p:blipFill>
+          <a:blip r:embed="rId2"/>
+          <a:stretch>
+            <a:fillRect/>
+          </a:stretch>
+        </p:blipFill>
+        <p:spPr>
+          <a:xfrm>
+            <a:off x="411480" y="2286000"/>
+            <a:ext cx="2286000" cy="2926080"/>
+          </a:xfrm>
+          <a:prstGeom prst="rect">
+            <a:avLst/>
+          </a:prstGeom>
+        </p:spPr>
+      </p:pic>
+      <p:pic>
+        <p:nvPicPr>
+          <p:cNvPr id="3" name="Picture 2" descr="chaayos_mug_black_20250904_023112_16741d2d.png"/>
+          <p:cNvPicPr>
+            <a:picLocks noChangeAspect="1"/>
+          </p:cNvPicPr>
+          <p:nvPr/>
+        </p:nvPicPr>
+        <p:blipFill>
+          <a:blip r:embed="rId3"/>
+          <a:stretch>
+            <a:fillRect/>
+          </a:stretch>
+        </p:blipFill>
+        <p:spPr>
+          <a:xfrm>
+            <a:off x="3429000" y="2286000"/>
+            <a:ext cx="2286000" cy="2926080"/>
+          </a:xfrm>
+          <a:prstGeom prst="rect">
+            <a:avLst/>
+          </a:prstGeom>
+        </p:spPr>
+      </p:pic>
+      <p:pic>
+        <p:nvPicPr>
+          <p:cNvPr id="4" name="Picture 3" descr="chaayos_mug_primary_20250904_023120_44d92003.png"/>
+          <p:cNvPicPr>
+            <a:picLocks noChangeAspect="1"/>
+          </p:cNvPicPr>
+          <p:nvPr/>
+        </p:nvPicPr>
+        <p:blipFill>
+          <a:blip r:embed="rId4"/>
+          <a:stretch>
+            <a:fillRect/>
+          </a:stretch>
+        </p:blipFill>
+        <p:spPr>
+          <a:xfrm>
+            <a:off x="6446520" y="2286000"/>
+            <a:ext cx="2286000" cy="2926080"/>
+          </a:xfrm>
+          <a:prstGeom prst="rect">
+            <a:avLst/>
+          </a:prstGeom>
+        </p:spPr>
+      </p:pic>
+      <p:cxnSp>
+        <p:nvCxnSpPr>
+          <p:cNvPr id="5" name="Connector 4"/>
+          <p:cNvCxnSpPr/>
+          <p:nvPr/>
+        </p:nvCxnSpPr>
+        <p:spPr>
+          <a:xfrm>
+            <a:off x="457200" y="5286375.0"/>
+            <a:ext cx="8229600" cy="0.0"/>
+          </a:xfrm>
+          <a:prstGeom prst="line">
+            <a:avLst/>
+          </a:prstGeom>
+          <a:ln w="25400">
+            <a:solidFill>
+              <a:srgbClr val="000000"/>
+            </a:solidFill>
+          </a:ln>
+        </p:spPr>
+        <p:style>
+          <a:lnRef idx="2">
+            <a:schemeClr val="accent1"/>
+          </a:lnRef>
+          <a:fillRef idx="0">
+            <a:schemeClr val="accent1"/>
+          </a:fillRef>
+          <a:effectRef idx="1">
+            <a:schemeClr val="accent1"/>
+          </a:effectRef>
+          <a:fontRef idx="minor">
+            <a:schemeClr val="tx1"/>
+          </a:fontRef>
+        </p:style>
+      </p:cxnSp>
+      <p:sp>
+        <p:nvSpPr>
+          <p:cNvPr id="6" name="TextBox 5"/>
+          <p:cNvSpPr txBox="1"/>
+          <p:nvPr/>
+        </p:nvSpPr>
+        <p:spPr>
+          <a:xfrm>
+            <a:off x="800100" y="5560695"/>
+            <a:ext cx="5486400" cy="731520"/>
+          </a:xfrm>
+          <a:prstGeom prst="rect">
+            <a:avLst/>
+          </a:prstGeom>
+          <a:noFill/>
+        </p:spPr>
+        <p:txBody>
+          <a:bodyPr wrap="none">
+            <a:spAutoFit/>
+          </a:bodyPr>
+          <a:lstStyle/>
+          <a:p>
+            <a:pPr algn="l">
+              <a:defRPr sz="2800" b="1">
+                <a:solidFill>
+                  <a:srgbClr val="000000"/>
+                </a:solidFill>
+                <a:latin typeface="Source Sans Pro"/>
+              </a:defRPr>
+            </a:pPr>
+            <a:r>
+              <a:t>BRAND MUGS</a:t>
+            </a:r>
+          </a:p>
+        </p:txBody>
+      </p:sp>
     </p:spTree>
   </p:cSld>
   <p:clrMapOvr>
@@ -8708,11 +8913,11 @@
                 <a:solidFill>
                   <a:srgbClr val="000000"/>
                 </a:solidFill>
-                <a:latin typeface="Source Sans Pro"/>
-              </a:defRPr>
-            </a:pPr>
-            <a:r>
-              <a:t>Welcome to Chaayos' brand identity system, where traditional chai culture meets modern café experience. As India's leading tea café chain, we've crafted a distinctive presence in the quick-service restaurant landscape that resonates across generations. Our identity system delivers an internationally appealing yet authentically Indian brand experience, ensuring consistent recognition while maintaining our proprietary edge. From customizable chai preparations to innovative food pairings, we serve the diverse needs of urban professionals, students, families, and tea enthusiasts alike, embodying our commitment to personalization, warmth, and exceptional quality in every cup we serve.</a:t>
+                <a:latin typeface="Inter"/>
+              </a:defRPr>
+            </a:pPr>
+            <a:r>
+              <a:t>Step into the world of Chaayos, where traditional chai culture meets modern innovation. As India's premier tea café destination, we craft every cup with precision and passion, offering a perfect blend of authenticity and contemporary comfort. Our globally recognized brand stands on the pillars of personalization, consistency, and an unwavering commitment to quality. From bustling professionals to leisurely tea connoisseurs, we create a vibrant space where conversations flow as freely as our signature brews, serving up more than just chai – we're crafting daily moments of joy and connection across our ever-growing family of cafés.</a:t>
             </a:r>
           </a:p>
         </p:txBody>
@@ -8779,7 +8984,7 @@
                 <a:solidFill>
                   <a:srgbClr val="059669"/>
                 </a:solidFill>
-                <a:latin typeface="Inter"/>
+                <a:latin typeface="Source Sans Pro"/>
               </a:defRPr>
             </a:pPr>
             <a:r>
@@ -8844,11 +9049,11 @@
                 <a:solidFill>
                   <a:srgbClr val="000000"/>
                 </a:solidFill>
-                <a:latin typeface="Source Sans Pro"/>
-              </a:defRPr>
-            </a:pPr>
-            <a:r>
-              <a:t>At Chaayos, our vision is to redefine the tea experience for Urban youth, Working professionals, Tea enthusiasts, Families, Students, and Millennials by fostering a culture of creativity and connection. We aspire to be the catalyst for innovative tea solutions that inspire moments of warmth, joy, and discovery in every sip, shaping a vibrant and inclusive community of tea lovers.</a:t>
+                <a:latin typeface="Inter"/>
+              </a:defRPr>
+            </a:pPr>
+            <a:r>
+              <a:t>At Chaayos, we envision a world where every cup of tea sparks innovation, connects communities, and brings warmth to the hearts of Urban youth, Working professionals, Tea enthusiasts, Families, Students, and Millennials. Our ultimate goal is to redefine the tea experience, inspiring creativity and delight in every sip.</a:t>
             </a:r>
           </a:p>
         </p:txBody>
@@ -8915,7 +9120,7 @@
                 <a:solidFill>
                   <a:srgbClr val="059669"/>
                 </a:solidFill>
-                <a:latin typeface="Inter"/>
+                <a:latin typeface="Source Sans Pro"/>
               </a:defRPr>
             </a:pPr>
             <a:r>
@@ -8980,11 +9185,11 @@
                 <a:solidFill>
                   <a:srgbClr val="000000"/>
                 </a:solidFill>
-                <a:latin typeface="Source Sans Pro"/>
-              </a:defRPr>
-            </a:pPr>
-            <a:r>
-              <a:t>Our mission at Chaayos is to craft exceptional Food &amp; Beverage experiences that celebrate the art of tea while delivering unparalleled customer delight. Through our distinctive Tea Cafés and Quick-service Restaurants, we aim to revolutionize the way people perceive and enjoy tea, offering a blend of quality, personalization, and authenticity that resonates with the diverse tastes and preferences of our target audience.</a:t>
+                <a:latin typeface="Inter"/>
+              </a:defRPr>
+            </a:pPr>
+            <a:r>
+              <a:t>Chaayos is dedicated to crafting unique and authentic Food &amp; Beverage solutions tailored to the diverse tastes of Urban youth, Working professionals, Tea enthusiasts, Families, Students, and Millennials. We strive to provide a premium tea café and quick-service restaurant experience that is innovative, reliable, and focused on customer satisfaction.</a:t>
             </a:r>
           </a:p>
         </p:txBody>
@@ -9051,7 +9256,7 @@
                 <a:solidFill>
                   <a:srgbClr val="059669"/>
                 </a:solidFill>
-                <a:latin typeface="Inter"/>
+                <a:latin typeface="Source Sans Pro"/>
               </a:defRPr>
             </a:pPr>
             <a:r>
@@ -9116,11 +9321,11 @@
                 <a:solidFill>
                   <a:srgbClr val="000000"/>
                 </a:solidFill>
-                <a:latin typeface="Source Sans Pro"/>
-              </a:defRPr>
-            </a:pPr>
-            <a:r>
-              <a:t>At the heart of Chaayos lie our core values of Warmth, Innovation, Authenticity, Customer Delight, Community, Quality, and Personalization. We infuse warmth into every cup we serve, constantly innovating to exceed expectations and deliver authentic tea experiences that delight our customers. Building a sense of community around tea, we uphold the highest standards of quality and personalize every interaction to create lasting connections with Urban youth, Working professionals, Tea enthusiasts, Families, Students, and Millennials.</a:t>
+                <a:latin typeface="Inter"/>
+              </a:defRPr>
+            </a:pPr>
+            <a:r>
+              <a:t>Our foundation at Chaayos is built on the pillars of Warmth, Innovation, Authenticity, Customer Delight, Community, Quality, and Personalization. We infuse these values into every aspect of our tea café and quick-service restaurants, creating spaces that not only serve exceptional tea but also foster a sense of belonging, creativity, and joy for all who walk through our doors.</a:t>
             </a:r>
           </a:p>
         </p:txBody>
@@ -9187,7 +9392,7 @@
                 <a:solidFill>
                   <a:srgbClr val="059669"/>
                 </a:solidFill>
-                <a:latin typeface="Inter"/>
+                <a:latin typeface="Source Sans Pro"/>
               </a:defRPr>
             </a:pPr>
             <a:r>
@@ -9252,11 +9457,11 @@
                 <a:solidFill>
                   <a:srgbClr val="000000"/>
                 </a:solidFill>
-                <a:latin typeface="Source Sans Pro"/>
-              </a:defRPr>
-            </a:pPr>
-            <a:r>
-              <a:t>Once upon a time in the bustling streets of the city, there was a place where the aroma of freshly brewed tea danced in the air, inviting all who passed by to step into a world of warmth and innovation. This place was Chaayos, a haven for urban youth, working professionals, tea enthusiasts, families, students, and millennials alike. At Chaayos, we believe in the power of a good cup of tea to bring people together, to create moments of joy and connection in the midst of a busy day. Our core values of authenticity, customer delight, and community are infused into every aspect of what we do, from sourcing the finest tea leaves to crafting unique and delicious blends that cater to the diverse tastes of our customers.</a:t>
+                <a:latin typeface="Inter"/>
+              </a:defRPr>
+            </a:pPr>
+            <a:r>
+              <a:t>In the bustling streets of modern cities, where the rhythm of life never seems to slow down, there exists a sanctuary for the urban youth, working professionals, tea enthusiasts, families, students, and millennials - Chaayos. Born out of a deep passion for tea and a desire to revolutionize the way people experience this beloved beverage, Chaayos stands as a beacon of warmth, innovation, and authenticity in a sea of generic cafes and restaurants. At the heart of Chaayos lies a commitment to customer delight, where every sip of tea is crafted with precision and care, ensuring a moment of pure bliss with each cup.</a:t>
             </a:r>
           </a:p>
         </p:txBody>
@@ -9323,7 +9528,7 @@
                 <a:solidFill>
                   <a:srgbClr val="059669"/>
                 </a:solidFill>
-                <a:latin typeface="Inter"/>
+                <a:latin typeface="Source Sans Pro"/>
               </a:defRPr>
             </a:pPr>
             <a:r>
@@ -9388,11 +9593,11 @@
                 <a:solidFill>
                   <a:srgbClr val="000000"/>
                 </a:solidFill>
-                <a:latin typeface="Source Sans Pro"/>
-              </a:defRPr>
-            </a:pPr>
-            <a:r>
-              <a:t>But what sets Chaayos apart is our commitment to innovation and personalization. We understand that our customers are individuals with their own preferences and cravings, which is why we offer a menu that is as diverse and dynamic as they are. From classic chai to fusion teas with a modern twist, from hearty snacks to indulgent desserts, we have something for everyone. Our brand promise is simple yet powerful: to empower urban...</a:t>
+                <a:latin typeface="Inter"/>
+              </a:defRPr>
+            </a:pPr>
+            <a:r>
+              <a:t>Our mission is simple yet profound - to empower individuals through our innovative food and beverage solutions, creating a space where communities thrive and connections are forged over a steaming cup of chai. Step into a Chaayos outlet, and you will be greeted by the aroma of freshly brewed teas, the sound of laughter and conversation, and the sight of vibrant decor that invites you to unwind and relax. Our menu, carefully curated to cater to the diverse tastes of our patrons, offers a unique blend of traditional and contemporary flavors, each dish prepared with the...</a:t>
             </a:r>
           </a:p>
         </p:txBody>
@@ -9459,7 +9664,7 @@
                 <a:solidFill>
                   <a:srgbClr val="059669"/>
                 </a:solidFill>
-                <a:latin typeface="Inter"/>
+                <a:latin typeface="Source Sans Pro"/>
               </a:defRPr>
             </a:pPr>
             <a:r>
@@ -9496,7 +9701,7 @@
       <p:grpSpPr/>
       <p:pic>
         <p:nvPicPr>
-          <p:cNvPr id="2" name="Picture 1" descr="chaayos_logo_1_20250904_020014_b8411bb2.png"/>
+          <p:cNvPr id="2" name="Picture 1" descr="chaayos_logo_1_20250904_022851_3cb662a1.png"/>
           <p:cNvPicPr>
             <a:picLocks noChangeAspect="1"/>
           </p:cNvPicPr>
@@ -9548,7 +9753,7 @@
                 <a:solidFill>
                   <a:srgbClr val="000000"/>
                 </a:solidFill>
-                <a:latin typeface="Source Sans Pro"/>
+                <a:latin typeface="Inter"/>
               </a:defRPr>
             </a:pPr>
             <a:r>
@@ -9619,7 +9824,7 @@
                 <a:solidFill>
                   <a:srgbClr val="059669"/>
                 </a:solidFill>
-                <a:latin typeface="Inter"/>
+                <a:latin typeface="Source Sans Pro"/>
               </a:defRPr>
             </a:pPr>
             <a:r>

--- a/output/chaayos/chaayos_enhanced_brand_book.pptx
+++ b/output/chaayos/chaayos_enhanced_brand_book.pptx
@@ -3118,7 +3118,7 @@
       <p:grpSpPr/>
       <p:pic>
         <p:nvPicPr>
-          <p:cNvPr id="2" name="Picture 1" descr="chaayos_logo_1_20250904_022851_3cb662a1.png"/>
+          <p:cNvPr id="2" name="Picture 1" descr="chaayos_logo_1_20251010_133827_0294b6a2.png"/>
           <p:cNvPicPr>
             <a:picLocks noChangeAspect="1"/>
           </p:cNvPicPr>
@@ -3156,7 +3156,7 @@
           </a:prstGeom>
           <a:ln>
             <a:solidFill>
-              <a:srgbClr val="059669"/>
+              <a:srgbClr val="810EB1"/>
             </a:solidFill>
           </a:ln>
         </p:spPr>
@@ -3200,9 +3200,9 @@
             <a:pPr algn="ctr">
               <a:defRPr sz="1800" b="0">
                 <a:solidFill>
-                  <a:srgbClr val="059669"/>
-                </a:solidFill>
-                <a:latin typeface="Inter"/>
+                  <a:srgbClr val="810EB1"/>
+                </a:solidFill>
+                <a:latin typeface="Source Sans Pro"/>
               </a:defRPr>
             </a:pPr>
             <a:r>
@@ -3239,7 +3239,7 @@
       <p:grpSpPr/>
       <p:pic>
         <p:nvPicPr>
-          <p:cNvPr id="2" name="Picture 1" descr="chaayos_logo_2_20250904_022906_819b3c22.png"/>
+          <p:cNvPr id="2" name="Picture 1" descr="chaayos_logo_2_20251010_133840_a7b6afc1.png"/>
           <p:cNvPicPr>
             <a:picLocks noChangeAspect="1"/>
           </p:cNvPicPr>
@@ -3291,7 +3291,7 @@
                 <a:solidFill>
                   <a:srgbClr val="000000"/>
                 </a:solidFill>
-                <a:latin typeface="Inter"/>
+                <a:latin typeface="Source Sans Pro"/>
               </a:defRPr>
             </a:pPr>
             <a:r>
@@ -3316,7 +3316,7 @@
           </a:prstGeom>
           <a:ln w="25400">
             <a:solidFill>
-              <a:srgbClr val="059669"/>
+              <a:srgbClr val="810EB1"/>
             </a:solidFill>
           </a:ln>
         </p:spPr>
@@ -3360,9 +3360,9 @@
             <a:pPr algn="l">
               <a:defRPr sz="2800" b="1">
                 <a:solidFill>
-                  <a:srgbClr val="059669"/>
-                </a:solidFill>
-                <a:latin typeface="Source Sans Pro"/>
+                  <a:srgbClr val="810EB1"/>
+                </a:solidFill>
+                <a:latin typeface="Inter"/>
               </a:defRPr>
             </a:pPr>
             <a:r>
@@ -3399,7 +3399,7 @@
       <p:grpSpPr/>
       <p:pic>
         <p:nvPicPr>
-          <p:cNvPr id="2" name="Picture 1" descr="chaayos_logo_3_20250904_022920_c3bf13fe.png"/>
+          <p:cNvPr id="2" name="Picture 1" descr="chaayos_logo_3_20251010_133852_16ece7d4.png"/>
           <p:cNvPicPr>
             <a:picLocks noChangeAspect="1"/>
           </p:cNvPicPr>
@@ -3451,7 +3451,7 @@
                 <a:solidFill>
                   <a:srgbClr val="000000"/>
                 </a:solidFill>
-                <a:latin typeface="Inter"/>
+                <a:latin typeface="Source Sans Pro"/>
               </a:defRPr>
             </a:pPr>
             <a:r>
@@ -3476,7 +3476,7 @@
           </a:prstGeom>
           <a:ln w="25400">
             <a:solidFill>
-              <a:srgbClr val="059669"/>
+              <a:srgbClr val="810EB1"/>
             </a:solidFill>
           </a:ln>
         </p:spPr>
@@ -3520,9 +3520,9 @@
             <a:pPr algn="l">
               <a:defRPr sz="2800" b="1">
                 <a:solidFill>
-                  <a:srgbClr val="059669"/>
-                </a:solidFill>
-                <a:latin typeface="Source Sans Pro"/>
+                  <a:srgbClr val="810EB1"/>
+                </a:solidFill>
+                <a:latin typeface="Inter"/>
               </a:defRPr>
             </a:pPr>
             <a:r>
@@ -3572,7 +3572,7 @@
             <a:avLst/>
           </a:prstGeom>
           <a:solidFill>
-            <a:srgbClr val="059669"/>
+            <a:srgbClr val="810EB1"/>
           </a:solidFill>
           <a:ln w="25400">
             <a:solidFill>
@@ -3632,11 +3632,11 @@
                 <a:solidFill>
                   <a:srgbClr val="000000"/>
                 </a:solidFill>
-                <a:latin typeface="Inter"/>
-              </a:defRPr>
-            </a:pPr>
-            <a:r>
-              <a:t>Logo Primary</a:t>
+                <a:latin typeface="Source Sans Pro"/>
+              </a:defRPr>
+            </a:pPr>
+            <a:r>
+              <a:t>Chaayos Purple</a:t>
             </a:r>
           </a:p>
           <a:p>
@@ -3648,11 +3648,11 @@
                 <a:solidFill>
                   <a:srgbClr val="000000"/>
                 </a:solidFill>
-                <a:latin typeface="Inter"/>
-              </a:defRPr>
-            </a:pPr>
-            <a:r>
-              <a:t>#059669</a:t>
+                <a:latin typeface="Source Sans Pro"/>
+              </a:defRPr>
+            </a:pPr>
+            <a:r>
+              <a:t>#810eb1</a:t>
             </a:r>
           </a:p>
           <a:p>
@@ -3664,11 +3664,11 @@
                 <a:solidFill>
                   <a:srgbClr val="000000"/>
                 </a:solidFill>
-                <a:latin typeface="Inter"/>
-              </a:defRPr>
-            </a:pPr>
-            <a:r>
-              <a:t>RGB(5, 150, 105)</a:t>
+                <a:latin typeface="Source Sans Pro"/>
+              </a:defRPr>
+            </a:pPr>
+            <a:r>
+              <a:t>RGB(129, 14, 177)</a:t>
             </a:r>
           </a:p>
           <a:p>
@@ -3680,11 +3680,11 @@
                 <a:solidFill>
                   <a:srgbClr val="000000"/>
                 </a:solidFill>
-                <a:latin typeface="Inter"/>
-              </a:defRPr>
-            </a:pPr>
-            <a:r>
-              <a:t>CMYK(96, 0, 30, 41)</a:t>
+                <a:latin typeface="Source Sans Pro"/>
+              </a:defRPr>
+            </a:pPr>
+            <a:r>
+              <a:t>CMYK(27, 92, 0, 30)</a:t>
             </a:r>
           </a:p>
           <a:p>
@@ -3696,11 +3696,11 @@
                 <a:solidFill>
                   <a:srgbClr val="000000"/>
                 </a:solidFill>
-                <a:latin typeface="Inter"/>
-              </a:defRPr>
-            </a:pPr>
-            <a:r>
-              <a:t>Use Dark Text</a:t>
+                <a:latin typeface="Source Sans Pro"/>
+              </a:defRPr>
+            </a:pPr>
+            <a:r>
+              <a:t>Use Light Text</a:t>
             </a:r>
           </a:p>
         </p:txBody>
@@ -3720,7 +3720,7 @@
             <a:avLst/>
           </a:prstGeom>
           <a:solidFill>
-            <a:srgbClr val="2E86AB"/>
+            <a:srgbClr val="2CB1BC"/>
           </a:solidFill>
           <a:ln w="25400">
             <a:solidFill>
@@ -3780,11 +3780,11 @@
                 <a:solidFill>
                   <a:srgbClr val="000000"/>
                 </a:solidFill>
-                <a:latin typeface="Inter"/>
-              </a:defRPr>
-            </a:pPr>
-            <a:r>
-              <a:t>Primary Blue</a:t>
+                <a:latin typeface="Source Sans Pro"/>
+              </a:defRPr>
+            </a:pPr>
+            <a:r>
+              <a:t>Tranquil Teal</a:t>
             </a:r>
           </a:p>
           <a:p>
@@ -3796,11 +3796,11 @@
                 <a:solidFill>
                   <a:srgbClr val="000000"/>
                 </a:solidFill>
-                <a:latin typeface="Inter"/>
-              </a:defRPr>
-            </a:pPr>
-            <a:r>
-              <a:t>#2E86AB</a:t>
+                <a:latin typeface="Source Sans Pro"/>
+              </a:defRPr>
+            </a:pPr>
+            <a:r>
+              <a:t>#2CB1BC</a:t>
             </a:r>
           </a:p>
           <a:p>
@@ -3812,11 +3812,11 @@
                 <a:solidFill>
                   <a:srgbClr val="000000"/>
                 </a:solidFill>
-                <a:latin typeface="Inter"/>
-              </a:defRPr>
-            </a:pPr>
-            <a:r>
-              <a:t>RGB(46, 134, 171)</a:t>
+                <a:latin typeface="Source Sans Pro"/>
+              </a:defRPr>
+            </a:pPr>
+            <a:r>
+              <a:t>RGB(44, 177, 188)</a:t>
             </a:r>
           </a:p>
           <a:p>
@@ -3828,11 +3828,11 @@
                 <a:solidFill>
                   <a:srgbClr val="000000"/>
                 </a:solidFill>
-                <a:latin typeface="Inter"/>
-              </a:defRPr>
-            </a:pPr>
-            <a:r>
-              <a:t>CMYK(73, 21, 0, 32)</a:t>
+                <a:latin typeface="Source Sans Pro"/>
+              </a:defRPr>
+            </a:pPr>
+            <a:r>
+              <a:t>CMYK(76, 5, 0, 26)</a:t>
             </a:r>
           </a:p>
           <a:p>
@@ -3844,7 +3844,7 @@
                 <a:solidFill>
                   <a:srgbClr val="000000"/>
                 </a:solidFill>
-                <a:latin typeface="Inter"/>
+                <a:latin typeface="Source Sans Pro"/>
               </a:defRPr>
             </a:pPr>
             <a:r>
@@ -3868,7 +3868,7 @@
             <a:avLst/>
           </a:prstGeom>
           <a:solidFill>
-            <a:srgbClr val="24A19C"/>
+            <a:srgbClr val="6ED2B1"/>
           </a:solidFill>
           <a:ln w="25400">
             <a:solidFill>
@@ -3928,11 +3928,11 @@
                 <a:solidFill>
                   <a:srgbClr val="000000"/>
                 </a:solidFill>
-                <a:latin typeface="Inter"/>
-              </a:defRPr>
-            </a:pPr>
-            <a:r>
-              <a:t>Accent Teal</a:t>
+                <a:latin typeface="Source Sans Pro"/>
+              </a:defRPr>
+            </a:pPr>
+            <a:r>
+              <a:t>Fresh Mint</a:t>
             </a:r>
           </a:p>
           <a:p>
@@ -3944,11 +3944,11 @@
                 <a:solidFill>
                   <a:srgbClr val="000000"/>
                 </a:solidFill>
-                <a:latin typeface="Inter"/>
-              </a:defRPr>
-            </a:pPr>
-            <a:r>
-              <a:t>#24A19C</a:t>
+                <a:latin typeface="Source Sans Pro"/>
+              </a:defRPr>
+            </a:pPr>
+            <a:r>
+              <a:t>#6ED2B1</a:t>
             </a:r>
           </a:p>
           <a:p>
@@ -3960,11 +3960,11 @@
                 <a:solidFill>
                   <a:srgbClr val="000000"/>
                 </a:solidFill>
-                <a:latin typeface="Inter"/>
-              </a:defRPr>
-            </a:pPr>
-            <a:r>
-              <a:t>RGB(36, 161, 156)</a:t>
+                <a:latin typeface="Source Sans Pro"/>
+              </a:defRPr>
+            </a:pPr>
+            <a:r>
+              <a:t>RGB(110, 210, 177)</a:t>
             </a:r>
           </a:p>
           <a:p>
@@ -3976,11 +3976,11 @@
                 <a:solidFill>
                   <a:srgbClr val="000000"/>
                 </a:solidFill>
-                <a:latin typeface="Inter"/>
-              </a:defRPr>
-            </a:pPr>
-            <a:r>
-              <a:t>CMYK(77, 0, 3, 36)</a:t>
+                <a:latin typeface="Source Sans Pro"/>
+              </a:defRPr>
+            </a:pPr>
+            <a:r>
+              <a:t>CMYK(47, 0, 15, 17)</a:t>
             </a:r>
           </a:p>
           <a:p>
@@ -3992,7 +3992,7 @@
                 <a:solidFill>
                   <a:srgbClr val="000000"/>
                 </a:solidFill>
-                <a:latin typeface="Inter"/>
+                <a:latin typeface="Source Sans Pro"/>
               </a:defRPr>
             </a:pPr>
             <a:r>
@@ -4016,7 +4016,7 @@
             <a:avLst/>
           </a:prstGeom>
           <a:solidFill>
-            <a:srgbClr val="1B365D"/>
+            <a:srgbClr val="C17C4E"/>
           </a:solidFill>
           <a:ln w="25400">
             <a:solidFill>
@@ -4076,11 +4076,11 @@
                 <a:solidFill>
                   <a:srgbClr val="000000"/>
                 </a:solidFill>
-                <a:latin typeface="Inter"/>
-              </a:defRPr>
-            </a:pPr>
-            <a:r>
-              <a:t>Deep Navy</a:t>
+                <a:latin typeface="Source Sans Pro"/>
+              </a:defRPr>
+            </a:pPr>
+            <a:r>
+              <a:t>Earthy Spice</a:t>
             </a:r>
           </a:p>
           <a:p>
@@ -4092,11 +4092,11 @@
                 <a:solidFill>
                   <a:srgbClr val="000000"/>
                 </a:solidFill>
-                <a:latin typeface="Inter"/>
-              </a:defRPr>
-            </a:pPr>
-            <a:r>
-              <a:t>#1B365D</a:t>
+                <a:latin typeface="Source Sans Pro"/>
+              </a:defRPr>
+            </a:pPr>
+            <a:r>
+              <a:t>#C17C4E</a:t>
             </a:r>
           </a:p>
           <a:p>
@@ -4108,11 +4108,11 @@
                 <a:solidFill>
                   <a:srgbClr val="000000"/>
                 </a:solidFill>
-                <a:latin typeface="Inter"/>
-              </a:defRPr>
-            </a:pPr>
-            <a:r>
-              <a:t>RGB(27, 54, 93)</a:t>
+                <a:latin typeface="Source Sans Pro"/>
+              </a:defRPr>
+            </a:pPr>
+            <a:r>
+              <a:t>RGB(193, 124, 78)</a:t>
             </a:r>
           </a:p>
           <a:p>
@@ -4124,11 +4124,11 @@
                 <a:solidFill>
                   <a:srgbClr val="000000"/>
                 </a:solidFill>
-                <a:latin typeface="Inter"/>
-              </a:defRPr>
-            </a:pPr>
-            <a:r>
-              <a:t>CMYK(70, 41, 0, 63)</a:t>
+                <a:latin typeface="Source Sans Pro"/>
+              </a:defRPr>
+            </a:pPr>
+            <a:r>
+              <a:t>CMYK(0, 35, 59, 24)</a:t>
             </a:r>
           </a:p>
           <a:p>
@@ -4140,11 +4140,11 @@
                 <a:solidFill>
                   <a:srgbClr val="000000"/>
                 </a:solidFill>
-                <a:latin typeface="Inter"/>
-              </a:defRPr>
-            </a:pPr>
-            <a:r>
-              <a:t>Use Light Text</a:t>
+                <a:latin typeface="Source Sans Pro"/>
+              </a:defRPr>
+            </a:pPr>
+            <a:r>
+              <a:t>Use Dark Text</a:t>
             </a:r>
           </a:p>
         </p:txBody>
@@ -4165,7 +4165,7 @@
           </a:prstGeom>
           <a:ln w="25400">
             <a:solidFill>
-              <a:srgbClr val="059669"/>
+              <a:srgbClr val="810EB1"/>
             </a:solidFill>
           </a:ln>
         </p:spPr>
@@ -4209,9 +4209,9 @@
             <a:pPr algn="l">
               <a:defRPr sz="2800" b="1">
                 <a:solidFill>
-                  <a:srgbClr val="059669"/>
-                </a:solidFill>
-                <a:latin typeface="Source Sans Pro"/>
+                  <a:srgbClr val="810EB1"/>
+                </a:solidFill>
+                <a:latin typeface="Inter"/>
               </a:defRPr>
             </a:pPr>
             <a:r>
@@ -4261,7 +4261,7 @@
             <a:avLst/>
           </a:prstGeom>
           <a:solidFill>
-            <a:srgbClr val="8AE1D0"/>
+            <a:srgbClr val="4F6B88"/>
           </a:solidFill>
           <a:ln w="25400">
             <a:solidFill>
@@ -4321,11 +4321,11 @@
                 <a:solidFill>
                   <a:srgbClr val="000000"/>
                 </a:solidFill>
-                <a:latin typeface="Inter"/>
-              </a:defRPr>
-            </a:pPr>
-            <a:r>
-              <a:t>Light Mint</a:t>
+                <a:latin typeface="Source Sans Pro"/>
+              </a:defRPr>
+            </a:pPr>
+            <a:r>
+              <a:t>Mystic Blue</a:t>
             </a:r>
           </a:p>
           <a:p>
@@ -4337,11 +4337,11 @@
                 <a:solidFill>
                   <a:srgbClr val="000000"/>
                 </a:solidFill>
-                <a:latin typeface="Inter"/>
-              </a:defRPr>
-            </a:pPr>
-            <a:r>
-              <a:t>#8AE1D0</a:t>
+                <a:latin typeface="Source Sans Pro"/>
+              </a:defRPr>
+            </a:pPr>
+            <a:r>
+              <a:t>#4F6B88</a:t>
             </a:r>
           </a:p>
           <a:p>
@@ -4353,11 +4353,11 @@
                 <a:solidFill>
                   <a:srgbClr val="000000"/>
                 </a:solidFill>
-                <a:latin typeface="Inter"/>
-              </a:defRPr>
-            </a:pPr>
-            <a:r>
-              <a:t>Use Dark Text</a:t>
+                <a:latin typeface="Source Sans Pro"/>
+              </a:defRPr>
+            </a:pPr>
+            <a:r>
+              <a:t>Use Light Text</a:t>
             </a:r>
           </a:p>
         </p:txBody>
@@ -4377,7 +4377,7 @@
             <a:avLst/>
           </a:prstGeom>
           <a:solidFill>
-            <a:srgbClr val="0F7267"/>
+            <a:srgbClr val="F7C7A7"/>
           </a:solidFill>
           <a:ln w="25400">
             <a:solidFill>
@@ -4437,11 +4437,11 @@
                 <a:solidFill>
                   <a:srgbClr val="000000"/>
                 </a:solidFill>
-                <a:latin typeface="Inter"/>
-              </a:defRPr>
-            </a:pPr>
-            <a:r>
-              <a:t>Dark Teal</a:t>
+                <a:latin typeface="Source Sans Pro"/>
+              </a:defRPr>
+            </a:pPr>
+            <a:r>
+              <a:t>Soft Peach</a:t>
             </a:r>
           </a:p>
           <a:p>
@@ -4453,11 +4453,11 @@
                 <a:solidFill>
                   <a:srgbClr val="000000"/>
                 </a:solidFill>
-                <a:latin typeface="Inter"/>
-              </a:defRPr>
-            </a:pPr>
-            <a:r>
-              <a:t>#0F7267</a:t>
+                <a:latin typeface="Source Sans Pro"/>
+              </a:defRPr>
+            </a:pPr>
+            <a:r>
+              <a:t>#F7C7A7</a:t>
             </a:r>
           </a:p>
           <a:p>
@@ -4469,11 +4469,11 @@
                 <a:solidFill>
                   <a:srgbClr val="000000"/>
                 </a:solidFill>
-                <a:latin typeface="Inter"/>
-              </a:defRPr>
-            </a:pPr>
-            <a:r>
-              <a:t>Use Light Text</a:t>
+                <a:latin typeface="Source Sans Pro"/>
+              </a:defRPr>
+            </a:pPr>
+            <a:r>
+              <a:t>Use Dark Text</a:t>
             </a:r>
           </a:p>
         </p:txBody>
@@ -4493,7 +4493,7 @@
             <a:avLst/>
           </a:prstGeom>
           <a:solidFill>
-            <a:srgbClr val="FFA69E"/>
+            <a:srgbClr val="8FB78D"/>
           </a:solidFill>
           <a:ln w="25400">
             <a:solidFill>
@@ -4553,11 +4553,11 @@
                 <a:solidFill>
                   <a:srgbClr val="000000"/>
                 </a:solidFill>
-                <a:latin typeface="Inter"/>
-              </a:defRPr>
-            </a:pPr>
-            <a:r>
-              <a:t>Soft Coral</a:t>
+                <a:latin typeface="Source Sans Pro"/>
+              </a:defRPr>
+            </a:pPr>
+            <a:r>
+              <a:t>Sage Green</a:t>
             </a:r>
           </a:p>
           <a:p>
@@ -4569,11 +4569,11 @@
                 <a:solidFill>
                   <a:srgbClr val="000000"/>
                 </a:solidFill>
-                <a:latin typeface="Inter"/>
-              </a:defRPr>
-            </a:pPr>
-            <a:r>
-              <a:t>#FFA69E</a:t>
+                <a:latin typeface="Source Sans Pro"/>
+              </a:defRPr>
+            </a:pPr>
+            <a:r>
+              <a:t>#8FB78D</a:t>
             </a:r>
           </a:p>
           <a:p>
@@ -4585,7 +4585,7 @@
                 <a:solidFill>
                   <a:srgbClr val="000000"/>
                 </a:solidFill>
-                <a:latin typeface="Inter"/>
+                <a:latin typeface="Source Sans Pro"/>
               </a:defRPr>
             </a:pPr>
             <a:r>
@@ -4609,7 +4609,7 @@
             <a:avLst/>
           </a:prstGeom>
           <a:solidFill>
-            <a:srgbClr val="B3A0C9"/>
+            <a:srgbClr val="C18C94"/>
           </a:solidFill>
           <a:ln w="25400">
             <a:solidFill>
@@ -4669,11 +4669,11 @@
                 <a:solidFill>
                   <a:srgbClr val="000000"/>
                 </a:solidFill>
-                <a:latin typeface="Inter"/>
-              </a:defRPr>
-            </a:pPr>
-            <a:r>
-              <a:t>Light Lavender</a:t>
+                <a:latin typeface="Source Sans Pro"/>
+              </a:defRPr>
+            </a:pPr>
+            <a:r>
+              <a:t>Dusty Rose</a:t>
             </a:r>
           </a:p>
           <a:p>
@@ -4685,11 +4685,11 @@
                 <a:solidFill>
                   <a:srgbClr val="000000"/>
                 </a:solidFill>
-                <a:latin typeface="Inter"/>
-              </a:defRPr>
-            </a:pPr>
-            <a:r>
-              <a:t>#B3A0C9</a:t>
+                <a:latin typeface="Source Sans Pro"/>
+              </a:defRPr>
+            </a:pPr>
+            <a:r>
+              <a:t>#C18C94</a:t>
             </a:r>
           </a:p>
           <a:p>
@@ -4701,7 +4701,7 @@
                 <a:solidFill>
                   <a:srgbClr val="000000"/>
                 </a:solidFill>
-                <a:latin typeface="Inter"/>
+                <a:latin typeface="Source Sans Pro"/>
               </a:defRPr>
             </a:pPr>
             <a:r>
@@ -4725,7 +4725,7 @@
             <a:avLst/>
           </a:prstGeom>
           <a:solidFill>
-            <a:srgbClr val="333333"/>
+            <a:srgbClr val="444444"/>
           </a:solidFill>
           <a:ln w="25400">
             <a:solidFill>
@@ -4785,11 +4785,11 @@
                 <a:solidFill>
                   <a:srgbClr val="000000"/>
                 </a:solidFill>
-                <a:latin typeface="Inter"/>
-              </a:defRPr>
-            </a:pPr>
-            <a:r>
-              <a:t>Charcoal</a:t>
+                <a:latin typeface="Source Sans Pro"/>
+              </a:defRPr>
+            </a:pPr>
+            <a:r>
+              <a:t>Charcoal Gray</a:t>
             </a:r>
           </a:p>
           <a:p>
@@ -4801,11 +4801,11 @@
                 <a:solidFill>
                   <a:srgbClr val="000000"/>
                 </a:solidFill>
-                <a:latin typeface="Inter"/>
-              </a:defRPr>
-            </a:pPr>
-            <a:r>
-              <a:t>#333333</a:t>
+                <a:latin typeface="Source Sans Pro"/>
+              </a:defRPr>
+            </a:pPr>
+            <a:r>
+              <a:t>#444444</a:t>
             </a:r>
           </a:p>
           <a:p>
@@ -4817,7 +4817,7 @@
                 <a:solidFill>
                   <a:srgbClr val="000000"/>
                 </a:solidFill>
-                <a:latin typeface="Inter"/>
+                <a:latin typeface="Source Sans Pro"/>
               </a:defRPr>
             </a:pPr>
             <a:r>
@@ -4842,7 +4842,7 @@
           </a:prstGeom>
           <a:ln w="25400">
             <a:solidFill>
-              <a:srgbClr val="059669"/>
+              <a:srgbClr val="810EB1"/>
             </a:solidFill>
           </a:ln>
         </p:spPr>
@@ -4886,9 +4886,9 @@
             <a:pPr algn="l">
               <a:defRPr sz="2800" b="1">
                 <a:solidFill>
-                  <a:srgbClr val="059669"/>
-                </a:solidFill>
-                <a:latin typeface="Source Sans Pro"/>
+                  <a:srgbClr val="810EB1"/>
+                </a:solidFill>
+                <a:latin typeface="Inter"/>
               </a:defRPr>
             </a:pPr>
             <a:r>
@@ -4953,7 +4953,7 @@
                 <a:solidFill>
                   <a:srgbClr val="000000"/>
                 </a:solidFill>
-                <a:latin typeface="Inter"/>
+                <a:latin typeface="Source Sans Pro"/>
               </a:defRPr>
             </a:pPr>
             <a:r>
@@ -4969,7 +4969,7 @@
                 <a:solidFill>
                   <a:srgbClr val="000000"/>
                 </a:solidFill>
-                <a:latin typeface="Inter"/>
+                <a:latin typeface="Source Sans Pro"/>
               </a:defRPr>
             </a:pPr>
           </a:p>
@@ -4982,7 +4982,7 @@
                 <a:solidFill>
                   <a:srgbClr val="000000"/>
                 </a:solidFill>
-                <a:latin typeface="Inter"/>
+                <a:latin typeface="Source Sans Pro"/>
               </a:defRPr>
             </a:pPr>
             <a:r>
@@ -4998,7 +4998,7 @@
                 <a:solidFill>
                   <a:srgbClr val="000000"/>
                 </a:solidFill>
-                <a:latin typeface="Inter"/>
+                <a:latin typeface="Source Sans Pro"/>
               </a:defRPr>
             </a:pPr>
             <a:r>
@@ -5014,7 +5014,7 @@
                 <a:solidFill>
                   <a:srgbClr val="000000"/>
                 </a:solidFill>
-                <a:latin typeface="Inter"/>
+                <a:latin typeface="Source Sans Pro"/>
               </a:defRPr>
             </a:pPr>
             <a:r>
@@ -5030,7 +5030,7 @@
                 <a:solidFill>
                   <a:srgbClr val="000000"/>
                 </a:solidFill>
-                <a:latin typeface="Inter"/>
+                <a:latin typeface="Source Sans Pro"/>
               </a:defRPr>
             </a:pPr>
             <a:r>
@@ -5046,7 +5046,7 @@
                 <a:solidFill>
                   <a:srgbClr val="000000"/>
                 </a:solidFill>
-                <a:latin typeface="Inter"/>
+                <a:latin typeface="Source Sans Pro"/>
               </a:defRPr>
             </a:pPr>
             <a:r>
@@ -5062,7 +5062,7 @@
                 <a:solidFill>
                   <a:srgbClr val="000000"/>
                 </a:solidFill>
-                <a:latin typeface="Inter"/>
+                <a:latin typeface="Source Sans Pro"/>
               </a:defRPr>
             </a:pPr>
           </a:p>
@@ -5075,11 +5075,11 @@
                 <a:solidFill>
                   <a:srgbClr val="000000"/>
                 </a:solidFill>
-                <a:latin typeface="Inter"/>
-              </a:defRPr>
-            </a:pPr>
-            <a:r>
-              <a:t>Colors: Logo Primary, Primary Blue, Accent Teal, Deep Navy</a:t>
+                <a:latin typeface="Source Sans Pro"/>
+              </a:defRPr>
+            </a:pPr>
+            <a:r>
+              <a:t>Colors: Chaayos Purple, Tranquil Teal, Fresh Mint, Earthy Spice</a:t>
             </a:r>
           </a:p>
           <a:p>
@@ -5091,7 +5091,7 @@
                 <a:solidFill>
                   <a:srgbClr val="000000"/>
                 </a:solidFill>
-                <a:latin typeface="Inter"/>
+                <a:latin typeface="Source Sans Pro"/>
               </a:defRPr>
             </a:pPr>
           </a:p>
@@ -5104,7 +5104,7 @@
                 <a:solidFill>
                   <a:srgbClr val="000000"/>
                 </a:solidFill>
-                <a:latin typeface="Inter"/>
+                <a:latin typeface="Source Sans Pro"/>
               </a:defRPr>
             </a:pPr>
             <a:r>
@@ -5120,7 +5120,7 @@
                 <a:solidFill>
                   <a:srgbClr val="000000"/>
                 </a:solidFill>
-                <a:latin typeface="Inter"/>
+                <a:latin typeface="Source Sans Pro"/>
               </a:defRPr>
             </a:pPr>
             <a:r>
@@ -5136,7 +5136,7 @@
                 <a:solidFill>
                   <a:srgbClr val="000000"/>
                 </a:solidFill>
-                <a:latin typeface="Inter"/>
+                <a:latin typeface="Source Sans Pro"/>
               </a:defRPr>
             </a:pPr>
             <a:r>
@@ -5152,7 +5152,7 @@
                 <a:solidFill>
                   <a:srgbClr val="000000"/>
                 </a:solidFill>
-                <a:latin typeface="Inter"/>
+                <a:latin typeface="Source Sans Pro"/>
               </a:defRPr>
             </a:pPr>
             <a:r>
@@ -5168,7 +5168,7 @@
                 <a:solidFill>
                   <a:srgbClr val="000000"/>
                 </a:solidFill>
-                <a:latin typeface="Inter"/>
+                <a:latin typeface="Source Sans Pro"/>
               </a:defRPr>
             </a:pPr>
             <a:r>
@@ -5193,7 +5193,7 @@
           </a:prstGeom>
           <a:ln w="25400">
             <a:solidFill>
-              <a:srgbClr val="059669"/>
+              <a:srgbClr val="810EB1"/>
             </a:solidFill>
           </a:ln>
         </p:spPr>
@@ -5237,9 +5237,9 @@
             <a:pPr algn="l">
               <a:defRPr sz="2800" b="1">
                 <a:solidFill>
-                  <a:srgbClr val="059669"/>
-                </a:solidFill>
-                <a:latin typeface="Source Sans Pro"/>
+                  <a:srgbClr val="810EB1"/>
+                </a:solidFill>
+                <a:latin typeface="Inter"/>
               </a:defRPr>
             </a:pPr>
             <a:r>
@@ -5304,7 +5304,7 @@
                 <a:solidFill>
                   <a:srgbClr val="000000"/>
                 </a:solidFill>
-                <a:latin typeface="Inter"/>
+                <a:latin typeface="Source Sans Pro"/>
               </a:defRPr>
             </a:pPr>
             <a:r>
@@ -5320,7 +5320,7 @@
                 <a:solidFill>
                   <a:srgbClr val="000000"/>
                 </a:solidFill>
-                <a:latin typeface="Inter"/>
+                <a:latin typeface="Source Sans Pro"/>
               </a:defRPr>
             </a:pPr>
           </a:p>
@@ -5333,7 +5333,7 @@
                 <a:solidFill>
                   <a:srgbClr val="000000"/>
                 </a:solidFill>
-                <a:latin typeface="Inter"/>
+                <a:latin typeface="Source Sans Pro"/>
               </a:defRPr>
             </a:pPr>
             <a:r>
@@ -5349,7 +5349,7 @@
                 <a:solidFill>
                   <a:srgbClr val="000000"/>
                 </a:solidFill>
-                <a:latin typeface="Inter"/>
+                <a:latin typeface="Source Sans Pro"/>
               </a:defRPr>
             </a:pPr>
             <a:r>
@@ -5365,7 +5365,7 @@
                 <a:solidFill>
                   <a:srgbClr val="000000"/>
                 </a:solidFill>
-                <a:latin typeface="Inter"/>
+                <a:latin typeface="Source Sans Pro"/>
               </a:defRPr>
             </a:pPr>
             <a:r>
@@ -5381,7 +5381,7 @@
                 <a:solidFill>
                   <a:srgbClr val="000000"/>
                 </a:solidFill>
-                <a:latin typeface="Inter"/>
+                <a:latin typeface="Source Sans Pro"/>
               </a:defRPr>
             </a:pPr>
             <a:r>
@@ -5397,7 +5397,7 @@
                 <a:solidFill>
                   <a:srgbClr val="000000"/>
                 </a:solidFill>
-                <a:latin typeface="Inter"/>
+                <a:latin typeface="Source Sans Pro"/>
               </a:defRPr>
             </a:pPr>
             <a:r>
@@ -5413,7 +5413,7 @@
                 <a:solidFill>
                   <a:srgbClr val="000000"/>
                 </a:solidFill>
-                <a:latin typeface="Inter"/>
+                <a:latin typeface="Source Sans Pro"/>
               </a:defRPr>
             </a:pPr>
           </a:p>
@@ -5426,11 +5426,11 @@
                 <a:solidFill>
                   <a:srgbClr val="000000"/>
                 </a:solidFill>
-                <a:latin typeface="Inter"/>
-              </a:defRPr>
-            </a:pPr>
-            <a:r>
-              <a:t>Colors: Light Mint, Dark Teal, Soft Coral, Light Lavender, Charcoal</a:t>
+                <a:latin typeface="Source Sans Pro"/>
+              </a:defRPr>
+            </a:pPr>
+            <a:r>
+              <a:t>Colors: Mystic Blue, Soft Peach, Sage Green, Dusty Rose, Charcoal Gray</a:t>
             </a:r>
           </a:p>
           <a:p>
@@ -5442,7 +5442,7 @@
                 <a:solidFill>
                   <a:srgbClr val="000000"/>
                 </a:solidFill>
-                <a:latin typeface="Inter"/>
+                <a:latin typeface="Source Sans Pro"/>
               </a:defRPr>
             </a:pPr>
           </a:p>
@@ -5455,7 +5455,7 @@
                 <a:solidFill>
                   <a:srgbClr val="000000"/>
                 </a:solidFill>
-                <a:latin typeface="Inter"/>
+                <a:latin typeface="Source Sans Pro"/>
               </a:defRPr>
             </a:pPr>
             <a:r>
@@ -5471,7 +5471,7 @@
                 <a:solidFill>
                   <a:srgbClr val="000000"/>
                 </a:solidFill>
-                <a:latin typeface="Inter"/>
+                <a:latin typeface="Source Sans Pro"/>
               </a:defRPr>
             </a:pPr>
             <a:r>
@@ -5487,7 +5487,7 @@
                 <a:solidFill>
                   <a:srgbClr val="000000"/>
                 </a:solidFill>
-                <a:latin typeface="Inter"/>
+                <a:latin typeface="Source Sans Pro"/>
               </a:defRPr>
             </a:pPr>
             <a:r>
@@ -5503,7 +5503,7 @@
                 <a:solidFill>
                   <a:srgbClr val="000000"/>
                 </a:solidFill>
-                <a:latin typeface="Inter"/>
+                <a:latin typeface="Source Sans Pro"/>
               </a:defRPr>
             </a:pPr>
             <a:r>
@@ -5519,7 +5519,7 @@
                 <a:solidFill>
                   <a:srgbClr val="000000"/>
                 </a:solidFill>
-                <a:latin typeface="Inter"/>
+                <a:latin typeface="Source Sans Pro"/>
               </a:defRPr>
             </a:pPr>
             <a:r>
@@ -5544,7 +5544,7 @@
           </a:prstGeom>
           <a:ln w="25400">
             <a:solidFill>
-              <a:srgbClr val="059669"/>
+              <a:srgbClr val="810EB1"/>
             </a:solidFill>
           </a:ln>
         </p:spPr>
@@ -5588,9 +5588,9 @@
             <a:pPr algn="l">
               <a:defRPr sz="2800" b="1">
                 <a:solidFill>
-                  <a:srgbClr val="059669"/>
-                </a:solidFill>
-                <a:latin typeface="Source Sans Pro"/>
+                  <a:srgbClr val="810EB1"/>
+                </a:solidFill>
+                <a:latin typeface="Inter"/>
               </a:defRPr>
             </a:pPr>
             <a:r>
@@ -5655,11 +5655,11 @@
                 <a:solidFill>
                   <a:srgbClr val="000000"/>
                 </a:solidFill>
-                <a:latin typeface="Inter"/>
-              </a:defRPr>
-            </a:pPr>
-            <a:r>
-              <a:t>Primary Font: Source Sans Pro</a:t>
+                <a:latin typeface="Source Sans Pro"/>
+              </a:defRPr>
+            </a:pPr>
+            <a:r>
+              <a:t>Primary Font: Inter</a:t>
             </a:r>
           </a:p>
           <a:p>
@@ -5671,7 +5671,7 @@
                 <a:solidFill>
                   <a:srgbClr val="000000"/>
                 </a:solidFill>
-                <a:latin typeface="Inter"/>
+                <a:latin typeface="Source Sans Pro"/>
               </a:defRPr>
             </a:pPr>
           </a:p>
@@ -5684,11 +5684,11 @@
                 <a:solidFill>
                   <a:srgbClr val="000000"/>
                 </a:solidFill>
-                <a:latin typeface="Inter"/>
-              </a:defRPr>
-            </a:pPr>
-            <a:r>
-              <a:t>Secondary Font: Inter</a:t>
+                <a:latin typeface="Source Sans Pro"/>
+              </a:defRPr>
+            </a:pPr>
+            <a:r>
+              <a:t>Secondary Font: Source Sans Pro</a:t>
             </a:r>
           </a:p>
           <a:p>
@@ -5700,7 +5700,7 @@
                 <a:solidFill>
                   <a:srgbClr val="000000"/>
                 </a:solidFill>
-                <a:latin typeface="Inter"/>
+                <a:latin typeface="Source Sans Pro"/>
               </a:defRPr>
             </a:pPr>
           </a:p>
@@ -5713,7 +5713,7 @@
                 <a:solidFill>
                   <a:srgbClr val="000000"/>
                 </a:solidFill>
-                <a:latin typeface="Inter"/>
+                <a:latin typeface="Source Sans Pro"/>
               </a:defRPr>
             </a:pPr>
             <a:r>
@@ -5729,11 +5729,11 @@
                 <a:solidFill>
                   <a:srgbClr val="000000"/>
                 </a:solidFill>
-                <a:latin typeface="Inter"/>
-              </a:defRPr>
-            </a:pPr>
-            <a:r>
-              <a:t>• Headlines: Source Sans Pro - Bold, 28-32pt</a:t>
+                <a:latin typeface="Source Sans Pro"/>
+              </a:defRPr>
+            </a:pPr>
+            <a:r>
+              <a:t>• Headlines: Inter - Bold, 28-32pt</a:t>
             </a:r>
           </a:p>
           <a:p>
@@ -5745,11 +5745,11 @@
                 <a:solidFill>
                   <a:srgbClr val="000000"/>
                 </a:solidFill>
-                <a:latin typeface="Inter"/>
-              </a:defRPr>
-            </a:pPr>
-            <a:r>
-              <a:t>• Subheadlines: Source Sans Pro - Bold, 20-24pt</a:t>
+                <a:latin typeface="Source Sans Pro"/>
+              </a:defRPr>
+            </a:pPr>
+            <a:r>
+              <a:t>• Subheadlines: Inter - Bold, 20-24pt</a:t>
             </a:r>
           </a:p>
           <a:p>
@@ -5761,11 +5761,11 @@
                 <a:solidFill>
                   <a:srgbClr val="000000"/>
                 </a:solidFill>
-                <a:latin typeface="Inter"/>
-              </a:defRPr>
-            </a:pPr>
-            <a:r>
-              <a:t>• Body Text: Inter - Regular, 16-18pt</a:t>
+                <a:latin typeface="Source Sans Pro"/>
+              </a:defRPr>
+            </a:pPr>
+            <a:r>
+              <a:t>• Body Text: Source Sans Pro - Regular, 16-18pt</a:t>
             </a:r>
           </a:p>
           <a:p>
@@ -5777,11 +5777,11 @@
                 <a:solidFill>
                   <a:srgbClr val="000000"/>
                 </a:solidFill>
-                <a:latin typeface="Inter"/>
-              </a:defRPr>
-            </a:pPr>
-            <a:r>
-              <a:t>• Caption Text: Inter - Regular, 12-14pt</a:t>
+                <a:latin typeface="Source Sans Pro"/>
+              </a:defRPr>
+            </a:pPr>
+            <a:r>
+              <a:t>• Caption Text: Source Sans Pro - Regular, 12-14pt</a:t>
             </a:r>
           </a:p>
         </p:txBody>
@@ -5802,7 +5802,7 @@
           </a:prstGeom>
           <a:ln w="25400">
             <a:solidFill>
-              <a:srgbClr val="059669"/>
+              <a:srgbClr val="810EB1"/>
             </a:solidFill>
           </a:ln>
         </p:spPr>
@@ -5846,9 +5846,9 @@
             <a:pPr algn="l">
               <a:defRPr sz="2800" b="1">
                 <a:solidFill>
-                  <a:srgbClr val="059669"/>
-                </a:solidFill>
-                <a:latin typeface="Source Sans Pro"/>
+                  <a:srgbClr val="810EB1"/>
+                </a:solidFill>
+                <a:latin typeface="Inter"/>
               </a:defRPr>
             </a:pPr>
             <a:r>
@@ -5913,7 +5913,7 @@
                 <a:solidFill>
                   <a:srgbClr val="000000"/>
                 </a:solidFill>
-                <a:latin typeface="Inter"/>
+                <a:latin typeface="Source Sans Pro"/>
               </a:defRPr>
             </a:pPr>
             <a:r>
@@ -5924,7 +5924,7 @@
       </p:sp>
       <p:pic>
         <p:nvPicPr>
-          <p:cNvPr id="3" name="Picture 2" descr="mdi_home_059669.png"/>
+          <p:cNvPr id="3" name="Picture 2" descr="mdi_home_810eb1.png"/>
           <p:cNvPicPr>
             <a:picLocks noChangeAspect="1"/>
           </p:cNvPicPr>
@@ -5948,7 +5948,7 @@
       </p:pic>
       <p:pic>
         <p:nvPicPr>
-          <p:cNvPr id="4" name="Picture 3" descr="mdi_account_059669.png"/>
+          <p:cNvPr id="4" name="Picture 3" descr="mdi_account_810eb1.png"/>
           <p:cNvPicPr>
             <a:picLocks noChangeAspect="1"/>
           </p:cNvPicPr>
@@ -5972,7 +5972,7 @@
       </p:pic>
       <p:pic>
         <p:nvPicPr>
-          <p:cNvPr id="5" name="Picture 4" descr="mdi_cog_059669.png"/>
+          <p:cNvPr id="5" name="Picture 4" descr="mdi_cog_810eb1.png"/>
           <p:cNvPicPr>
             <a:picLocks noChangeAspect="1"/>
           </p:cNvPicPr>
@@ -5996,7 +5996,7 @@
       </p:pic>
       <p:pic>
         <p:nvPicPr>
-          <p:cNvPr id="6" name="Picture 5" descr="mdi_briefcase_059669.png"/>
+          <p:cNvPr id="6" name="Picture 5" descr="mdi_briefcase_810eb1.png"/>
           <p:cNvPicPr>
             <a:picLocks noChangeAspect="1"/>
           </p:cNvPicPr>
@@ -6020,7 +6020,7 @@
       </p:pic>
       <p:pic>
         <p:nvPicPr>
-          <p:cNvPr id="7" name="Picture 6" descr="mdi_office-building_059669.png"/>
+          <p:cNvPr id="7" name="Picture 6" descr="mdi_office-building_810eb1.png"/>
           <p:cNvPicPr>
             <a:picLocks noChangeAspect="1"/>
           </p:cNvPicPr>
@@ -6044,7 +6044,7 @@
       </p:pic>
       <p:pic>
         <p:nvPicPr>
-          <p:cNvPr id="8" name="Picture 7" descr="mdi_handshake_059669.png"/>
+          <p:cNvPr id="8" name="Picture 7" descr="mdi_handshake_810eb1.png"/>
           <p:cNvPicPr>
             <a:picLocks noChangeAspect="1"/>
           </p:cNvPicPr>
@@ -6068,7 +6068,7 @@
       </p:pic>
       <p:pic>
         <p:nvPicPr>
-          <p:cNvPr id="9" name="Picture 8" descr="mdi_chart-line_059669.png"/>
+          <p:cNvPr id="9" name="Picture 8" descr="mdi_chart-line_810eb1.png"/>
           <p:cNvPicPr>
             <a:picLocks noChangeAspect="1"/>
           </p:cNvPicPr>
@@ -6092,7 +6092,7 @@
       </p:pic>
       <p:pic>
         <p:nvPicPr>
-          <p:cNvPr id="10" name="Picture 9" descr="mdi_presentation_059669.png"/>
+          <p:cNvPr id="10" name="Picture 9" descr="mdi_presentation_810eb1.png"/>
           <p:cNvPicPr>
             <a:picLocks noChangeAspect="1"/>
           </p:cNvPicPr>
@@ -6116,7 +6116,7 @@
       </p:pic>
       <p:pic>
         <p:nvPicPr>
-          <p:cNvPr id="11" name="Picture 10" descr="mdi_calendar_059669.png"/>
+          <p:cNvPr id="11" name="Picture 10" descr="mdi_calendar_810eb1.png"/>
           <p:cNvPicPr>
             <a:picLocks noChangeAspect="1"/>
           </p:cNvPicPr>
@@ -6140,7 +6140,7 @@
       </p:pic>
       <p:pic>
         <p:nvPicPr>
-          <p:cNvPr id="12" name="Picture 11" descr="mdi_email_059669.png"/>
+          <p:cNvPr id="12" name="Picture 11" descr="mdi_email_810eb1.png"/>
           <p:cNvPicPr>
             <a:picLocks noChangeAspect="1"/>
           </p:cNvPicPr>
@@ -6164,7 +6164,7 @@
       </p:pic>
       <p:pic>
         <p:nvPicPr>
-          <p:cNvPr id="13" name="Picture 12" descr="mdi_lightbulb_059669.png"/>
+          <p:cNvPr id="13" name="Picture 12" descr="mdi_lightbulb_810eb1.png"/>
           <p:cNvPicPr>
             <a:picLocks noChangeAspect="1"/>
           </p:cNvPicPr>
@@ -6188,7 +6188,7 @@
       </p:pic>
       <p:pic>
         <p:nvPicPr>
-          <p:cNvPr id="14" name="Picture 13" descr="mdi_rocket_059669.png"/>
+          <p:cNvPr id="14" name="Picture 13" descr="mdi_rocket_810eb1.png"/>
           <p:cNvPicPr>
             <a:picLocks noChangeAspect="1"/>
           </p:cNvPicPr>
@@ -6212,7 +6212,7 @@
       </p:pic>
       <p:pic>
         <p:nvPicPr>
-          <p:cNvPr id="15" name="Picture 14" descr="mdi_account-group_059669.png"/>
+          <p:cNvPr id="15" name="Picture 14" descr="mdi_star_810eb1.png"/>
           <p:cNvPicPr>
             <a:picLocks noChangeAspect="1"/>
           </p:cNvPicPr>
@@ -6236,7 +6236,7 @@
       </p:pic>
       <p:pic>
         <p:nvPicPr>
-          <p:cNvPr id="16" name="Picture 15" descr="mdi_star_059669.png"/>
+          <p:cNvPr id="16" name="Picture 15" descr="mdi_medal_810eb1.png"/>
           <p:cNvPicPr>
             <a:picLocks noChangeAspect="1"/>
           </p:cNvPicPr>
@@ -6258,9 +6258,33 @@
           </a:prstGeom>
         </p:spPr>
       </p:pic>
+      <p:pic>
+        <p:nvPicPr>
+          <p:cNvPr id="17" name="Picture 16" descr="mdi_briefcase_810eb1.png"/>
+          <p:cNvPicPr>
+            <a:picLocks noChangeAspect="1"/>
+          </p:cNvPicPr>
+          <p:nvPr/>
+        </p:nvPicPr>
+        <p:blipFill>
+          <a:blip r:embed="rId5"/>
+          <a:stretch>
+            <a:fillRect/>
+          </a:stretch>
+        </p:blipFill>
+        <p:spPr>
+          <a:xfrm>
+            <a:off x="7598664" y="3840480"/>
+            <a:ext cx="822960" cy="822960"/>
+          </a:xfrm>
+          <a:prstGeom prst="rect">
+            <a:avLst/>
+          </a:prstGeom>
+        </p:spPr>
+      </p:pic>
       <p:cxnSp>
         <p:nvCxnSpPr>
-          <p:cNvPr id="17" name="Connector 16"/>
+          <p:cNvPr id="18" name="Connector 17"/>
           <p:cNvCxnSpPr/>
           <p:nvPr/>
         </p:nvCxnSpPr>
@@ -6274,7 +6298,7 @@
           </a:prstGeom>
           <a:ln w="25400">
             <a:solidFill>
-              <a:srgbClr val="059669"/>
+              <a:srgbClr val="810EB1"/>
             </a:solidFill>
           </a:ln>
         </p:spPr>
@@ -6295,7 +6319,7 @@
       </p:cxnSp>
       <p:sp>
         <p:nvSpPr>
-          <p:cNvPr id="18" name="TextBox 17"/>
+          <p:cNvPr id="19" name="TextBox 18"/>
           <p:cNvSpPr txBox="1"/>
           <p:nvPr/>
         </p:nvSpPr>
@@ -6318,9 +6342,9 @@
             <a:pPr algn="l">
               <a:defRPr sz="2800" b="1">
                 <a:solidFill>
-                  <a:srgbClr val="059669"/>
-                </a:solidFill>
-                <a:latin typeface="Source Sans Pro"/>
+                  <a:srgbClr val="810EB1"/>
+                </a:solidFill>
+                <a:latin typeface="Inter"/>
               </a:defRPr>
             </a:pPr>
             <a:r>
@@ -6385,18 +6409,18 @@
                 <a:solidFill>
                   <a:srgbClr val="000000"/>
                 </a:solidFill>
-                <a:latin typeface="Inter"/>
-              </a:defRPr>
-            </a:pPr>
-            <a:r>
-              <a:t>Chaayos - Food &amp; Beverage (Tea Cafés, Quick-Service Restaurants) Industry Icons</a:t>
+                <a:latin typeface="Source Sans Pro"/>
+              </a:defRPr>
+            </a:pPr>
+            <a:r>
+              <a:t>Chaayos - Food &amp; Beverage / Qsr (Quick Service Tea Café) Industry Icons</a:t>
             </a:r>
           </a:p>
         </p:txBody>
       </p:sp>
       <p:pic>
         <p:nvPicPr>
-          <p:cNvPr id="3" name="Picture 2" descr="mdi_linkedin_059669.png"/>
+          <p:cNvPr id="3" name="Picture 2" descr="mdi_linkedin_810eb1.png"/>
           <p:cNvPicPr>
             <a:picLocks noChangeAspect="1"/>
           </p:cNvPicPr>
@@ -6420,7 +6444,7 @@
       </p:pic>
       <p:pic>
         <p:nvPicPr>
-          <p:cNvPr id="4" name="Picture 3" descr="mdi_microsoft_059669.png"/>
+          <p:cNvPr id="4" name="Picture 3" descr="mdi_microsoft_810eb1.png"/>
           <p:cNvPicPr>
             <a:picLocks noChangeAspect="1"/>
           </p:cNvPicPr>
@@ -6444,7 +6468,7 @@
       </p:pic>
       <p:pic>
         <p:nvPicPr>
-          <p:cNvPr id="5" name="Picture 4" descr="mdi_google_059669.png"/>
+          <p:cNvPr id="5" name="Picture 4" descr="mdi_google_810eb1.png"/>
           <p:cNvPicPr>
             <a:picLocks noChangeAspect="1"/>
           </p:cNvPicPr>
@@ -6468,7 +6492,7 @@
       </p:pic>
       <p:pic>
         <p:nvPicPr>
-          <p:cNvPr id="6" name="Picture 5" descr="mdi_slack_059669.png"/>
+          <p:cNvPr id="6" name="Picture 5" descr="mdi_slack_810eb1.png"/>
           <p:cNvPicPr>
             <a:picLocks noChangeAspect="1"/>
           </p:cNvPicPr>
@@ -6492,7 +6516,7 @@
       </p:pic>
       <p:pic>
         <p:nvPicPr>
-          <p:cNvPr id="7" name="Picture 6" descr="mdi_dropbox_059669.png"/>
+          <p:cNvPr id="7" name="Picture 6" descr="mdi_dropbox_810eb1.png"/>
           <p:cNvPicPr>
             <a:picLocks noChangeAspect="1"/>
           </p:cNvPicPr>
@@ -6516,7 +6540,7 @@
       </p:pic>
       <p:pic>
         <p:nvPicPr>
-          <p:cNvPr id="8" name="Picture 7" descr="mdi_onedrive_059669.png"/>
+          <p:cNvPr id="8" name="Picture 7" descr="mdi_onedrive_810eb1.png"/>
           <p:cNvPicPr>
             <a:picLocks noChangeAspect="1"/>
           </p:cNvPicPr>
@@ -6540,7 +6564,7 @@
       </p:pic>
       <p:pic>
         <p:nvPicPr>
-          <p:cNvPr id="9" name="Picture 8" descr="mdi_facebook_059669.png"/>
+          <p:cNvPr id="9" name="Picture 8" descr="mdi_facebook_810eb1.png"/>
           <p:cNvPicPr>
             <a:picLocks noChangeAspect="1"/>
           </p:cNvPicPr>
@@ -6564,7 +6588,7 @@
       </p:pic>
       <p:pic>
         <p:nvPicPr>
-          <p:cNvPr id="10" name="Picture 9" descr="mdi_twitter_059669.png"/>
+          <p:cNvPr id="10" name="Picture 9" descr="mdi_twitter_810eb1.png"/>
           <p:cNvPicPr>
             <a:picLocks noChangeAspect="1"/>
           </p:cNvPicPr>
@@ -6588,7 +6612,7 @@
       </p:pic>
       <p:pic>
         <p:nvPicPr>
-          <p:cNvPr id="11" name="Picture 10" descr="mdi_lightbulb_059669.png"/>
+          <p:cNvPr id="11" name="Picture 10" descr="mdi_lightbulb_810eb1.png"/>
           <p:cNvPicPr>
             <a:picLocks noChangeAspect="1"/>
           </p:cNvPicPr>
@@ -6612,7 +6636,7 @@
       </p:pic>
       <p:pic>
         <p:nvPicPr>
-          <p:cNvPr id="12" name="Picture 11" descr="mdi_rocket_059669.png"/>
+          <p:cNvPr id="12" name="Picture 11" descr="mdi_rocket_810eb1.png"/>
           <p:cNvPicPr>
             <a:picLocks noChangeAspect="1"/>
           </p:cNvPicPr>
@@ -6636,7 +6660,7 @@
       </p:pic>
       <p:pic>
         <p:nvPicPr>
-          <p:cNvPr id="13" name="Picture 12" descr="mdi_account-group_059669.png"/>
+          <p:cNvPr id="13" name="Picture 12" descr="mdi_star_810eb1.png"/>
           <p:cNvPicPr>
             <a:picLocks noChangeAspect="1"/>
           </p:cNvPicPr>
@@ -6660,7 +6684,7 @@
       </p:pic>
       <p:pic>
         <p:nvPicPr>
-          <p:cNvPr id="14" name="Picture 13" descr="mdi_star_059669.png"/>
+          <p:cNvPr id="14" name="Picture 13" descr="mdi_medal_810eb1.png"/>
           <p:cNvPicPr>
             <a:picLocks noChangeAspect="1"/>
           </p:cNvPicPr>
@@ -6682,9 +6706,33 @@
           </a:prstGeom>
         </p:spPr>
       </p:pic>
+      <p:pic>
+        <p:nvPicPr>
+          <p:cNvPr id="15" name="Picture 14" descr="mdi_briefcase_810eb1.png"/>
+          <p:cNvPicPr>
+            <a:picLocks noChangeAspect="1"/>
+          </p:cNvPicPr>
+          <p:nvPr/>
+        </p:nvPicPr>
+        <p:blipFill>
+          <a:blip r:embed="rId14"/>
+          <a:stretch>
+            <a:fillRect/>
+          </a:stretch>
+        </p:blipFill>
+        <p:spPr>
+          <a:xfrm>
+            <a:off x="4160520" y="3840480"/>
+            <a:ext cx="822960" cy="822960"/>
+          </a:xfrm>
+          <a:prstGeom prst="rect">
+            <a:avLst/>
+          </a:prstGeom>
+        </p:spPr>
+      </p:pic>
       <p:cxnSp>
         <p:nvCxnSpPr>
-          <p:cNvPr id="15" name="Connector 14"/>
+          <p:cNvPr id="16" name="Connector 15"/>
           <p:cNvCxnSpPr/>
           <p:nvPr/>
         </p:nvCxnSpPr>
@@ -6698,7 +6746,7 @@
           </a:prstGeom>
           <a:ln w="25400">
             <a:solidFill>
-              <a:srgbClr val="059669"/>
+              <a:srgbClr val="810EB1"/>
             </a:solidFill>
           </a:ln>
         </p:spPr>
@@ -6719,7 +6767,7 @@
       </p:cxnSp>
       <p:sp>
         <p:nvSpPr>
-          <p:cNvPr id="16" name="TextBox 15"/>
+          <p:cNvPr id="17" name="TextBox 16"/>
           <p:cNvSpPr txBox="1"/>
           <p:nvPr/>
         </p:nvSpPr>
@@ -6742,9 +6790,9 @@
             <a:pPr algn="l">
               <a:defRPr sz="2800" b="1">
                 <a:solidFill>
-                  <a:srgbClr val="059669"/>
-                </a:solidFill>
-                <a:latin typeface="Source Sans Pro"/>
+                  <a:srgbClr val="810EB1"/>
+                </a:solidFill>
+                <a:latin typeface="Inter"/>
               </a:defRPr>
             </a:pPr>
             <a:r>
@@ -6809,7 +6857,7 @@
                 <a:solidFill>
                   <a:srgbClr val="000000"/>
                 </a:solidFill>
-                <a:latin typeface="Inter"/>
+                <a:latin typeface="Source Sans Pro"/>
               </a:defRPr>
             </a:pPr>
             <a:r>
@@ -6825,11 +6873,11 @@
                 <a:solidFill>
                   <a:srgbClr val="000000"/>
                 </a:solidFill>
-                <a:latin typeface="Inter"/>
-              </a:defRPr>
-            </a:pPr>
-            <a:r>
-              <a:t>Color: #059669 on black background</a:t>
+                <a:latin typeface="Source Sans Pro"/>
+              </a:defRPr>
+            </a:pPr>
+            <a:r>
+              <a:t>Color: #810eb1 on black background</a:t>
             </a:r>
           </a:p>
           <a:p>
@@ -6841,7 +6889,7 @@
                 <a:solidFill>
                   <a:srgbClr val="000000"/>
                 </a:solidFill>
-                <a:latin typeface="Inter"/>
+                <a:latin typeface="Source Sans Pro"/>
               </a:defRPr>
             </a:pPr>
           </a:p>
@@ -6854,7 +6902,7 @@
                 <a:solidFill>
                   <a:srgbClr val="000000"/>
                 </a:solidFill>
-                <a:latin typeface="Inter"/>
+                <a:latin typeface="Source Sans Pro"/>
               </a:defRPr>
             </a:pPr>
             <a:r>
@@ -6870,7 +6918,7 @@
                 <a:solidFill>
                   <a:srgbClr val="000000"/>
                 </a:solidFill>
-                <a:latin typeface="Inter"/>
+                <a:latin typeface="Source Sans Pro"/>
               </a:defRPr>
             </a:pPr>
             <a:r>
@@ -6886,7 +6934,7 @@
                 <a:solidFill>
                   <a:srgbClr val="000000"/>
                 </a:solidFill>
-                <a:latin typeface="Inter"/>
+                <a:latin typeface="Source Sans Pro"/>
               </a:defRPr>
             </a:pPr>
             <a:r>
@@ -6902,7 +6950,7 @@
                 <a:solidFill>
                   <a:srgbClr val="000000"/>
                 </a:solidFill>
-                <a:latin typeface="Inter"/>
+                <a:latin typeface="Source Sans Pro"/>
               </a:defRPr>
             </a:pPr>
           </a:p>
@@ -6915,7 +6963,7 @@
                 <a:solidFill>
                   <a:srgbClr val="000000"/>
                 </a:solidFill>
-                <a:latin typeface="Inter"/>
+                <a:latin typeface="Source Sans Pro"/>
               </a:defRPr>
             </a:pPr>
             <a:r>
@@ -6931,7 +6979,7 @@
                 <a:solidFill>
                   <a:srgbClr val="000000"/>
                 </a:solidFill>
-                <a:latin typeface="Inter"/>
+                <a:latin typeface="Source Sans Pro"/>
               </a:defRPr>
             </a:pPr>
             <a:r>
@@ -6947,7 +6995,7 @@
                 <a:solidFill>
                   <a:srgbClr val="000000"/>
                 </a:solidFill>
-                <a:latin typeface="Inter"/>
+                <a:latin typeface="Source Sans Pro"/>
               </a:defRPr>
             </a:pPr>
             <a:r>
@@ -6972,7 +7020,7 @@
           </a:prstGeom>
           <a:ln w="25400">
             <a:solidFill>
-              <a:srgbClr val="059669"/>
+              <a:srgbClr val="810EB1"/>
             </a:solidFill>
           </a:ln>
         </p:spPr>
@@ -7016,9 +7064,9 @@
             <a:pPr algn="l">
               <a:defRPr sz="2800" b="1">
                 <a:solidFill>
-                  <a:srgbClr val="059669"/>
-                </a:solidFill>
-                <a:latin typeface="Source Sans Pro"/>
+                  <a:srgbClr val="810EB1"/>
+                </a:solidFill>
+                <a:latin typeface="Inter"/>
               </a:defRPr>
             </a:pPr>
             <a:r>
@@ -7078,9 +7126,9 @@
             <a:pPr>
               <a:defRPr sz="2800" b="1">
                 <a:solidFill>
-                  <a:srgbClr val="059669"/>
-                </a:solidFill>
-                <a:latin typeface="Source Sans Pro"/>
+                  <a:srgbClr val="810EB1"/>
+                </a:solidFill>
+                <a:latin typeface="Inter"/>
               </a:defRPr>
             </a:pPr>
             <a:r>
@@ -7105,7 +7153,7 @@
           </a:prstGeom>
           <a:ln w="25400">
             <a:solidFill>
-              <a:srgbClr val="059669"/>
+              <a:srgbClr val="810EB1"/>
             </a:solidFill>
           </a:ln>
         </p:spPr>
@@ -7151,7 +7199,7 @@
                 <a:solidFill>
                   <a:srgbClr val="000000"/>
                 </a:solidFill>
-                <a:latin typeface="Inter"/>
+                <a:latin typeface="Source Sans Pro"/>
               </a:defRPr>
             </a:pPr>
             <a:r>
@@ -7176,7 +7224,7 @@
           </a:prstGeom>
           <a:ln w="19050">
             <a:solidFill>
-              <a:srgbClr val="059669"/>
+              <a:srgbClr val="810EB1"/>
             </a:solidFill>
           </a:ln>
         </p:spPr>
@@ -7220,9 +7268,9 @@
             <a:pPr>
               <a:defRPr sz="1200" b="1">
                 <a:solidFill>
-                  <a:srgbClr val="059669"/>
-                </a:solidFill>
-                <a:latin typeface="Inter"/>
+                  <a:srgbClr val="810EB1"/>
+                </a:solidFill>
+                <a:latin typeface="Source Sans Pro"/>
               </a:defRPr>
             </a:pPr>
             <a:r>
@@ -7258,7 +7306,7 @@
                 <a:solidFill>
                   <a:srgbClr val="000000"/>
                 </a:solidFill>
-                <a:latin typeface="Inter"/>
+                <a:latin typeface="Source Sans Pro"/>
               </a:defRPr>
             </a:pPr>
             <a:r>
@@ -7283,7 +7331,7 @@
           </a:prstGeom>
           <a:ln w="19050">
             <a:solidFill>
-              <a:srgbClr val="059669"/>
+              <a:srgbClr val="810EB1"/>
             </a:solidFill>
           </a:ln>
         </p:spPr>
@@ -7327,9 +7375,9 @@
             <a:pPr>
               <a:defRPr sz="1200" b="1">
                 <a:solidFill>
-                  <a:srgbClr val="059669"/>
-                </a:solidFill>
-                <a:latin typeface="Inter"/>
+                  <a:srgbClr val="810EB1"/>
+                </a:solidFill>
+                <a:latin typeface="Source Sans Pro"/>
               </a:defRPr>
             </a:pPr>
             <a:r>
@@ -7365,7 +7413,7 @@
                 <a:solidFill>
                   <a:srgbClr val="000000"/>
                 </a:solidFill>
-                <a:latin typeface="Inter"/>
+                <a:latin typeface="Source Sans Pro"/>
               </a:defRPr>
             </a:pPr>
             <a:r>
@@ -7390,7 +7438,7 @@
           </a:prstGeom>
           <a:ln w="19050">
             <a:solidFill>
-              <a:srgbClr val="059669"/>
+              <a:srgbClr val="810EB1"/>
             </a:solidFill>
           </a:ln>
         </p:spPr>
@@ -7434,9 +7482,9 @@
             <a:pPr>
               <a:defRPr sz="1200" b="1">
                 <a:solidFill>
-                  <a:srgbClr val="059669"/>
-                </a:solidFill>
-                <a:latin typeface="Inter"/>
+                  <a:srgbClr val="810EB1"/>
+                </a:solidFill>
+                <a:latin typeface="Source Sans Pro"/>
               </a:defRPr>
             </a:pPr>
             <a:r>
@@ -7472,7 +7520,7 @@
                 <a:solidFill>
                   <a:srgbClr val="000000"/>
                 </a:solidFill>
-                <a:latin typeface="Inter"/>
+                <a:latin typeface="Source Sans Pro"/>
               </a:defRPr>
             </a:pPr>
             <a:r>
@@ -7497,7 +7545,7 @@
           </a:prstGeom>
           <a:ln w="19050">
             <a:solidFill>
-              <a:srgbClr val="059669"/>
+              <a:srgbClr val="810EB1"/>
             </a:solidFill>
           </a:ln>
         </p:spPr>
@@ -7541,9 +7589,9 @@
             <a:pPr>
               <a:defRPr sz="1200" b="1">
                 <a:solidFill>
-                  <a:srgbClr val="059669"/>
-                </a:solidFill>
-                <a:latin typeface="Inter"/>
+                  <a:srgbClr val="810EB1"/>
+                </a:solidFill>
+                <a:latin typeface="Source Sans Pro"/>
               </a:defRPr>
             </a:pPr>
             <a:r>
@@ -7579,7 +7627,7 @@
                 <a:solidFill>
                   <a:srgbClr val="000000"/>
                 </a:solidFill>
-                <a:latin typeface="Inter"/>
+                <a:latin typeface="Source Sans Pro"/>
               </a:defRPr>
             </a:pPr>
             <a:r>
@@ -7604,7 +7652,7 @@
           </a:prstGeom>
           <a:ln w="19050">
             <a:solidFill>
-              <a:srgbClr val="059669"/>
+              <a:srgbClr val="810EB1"/>
             </a:solidFill>
           </a:ln>
         </p:spPr>
@@ -7648,9 +7696,9 @@
             <a:pPr>
               <a:defRPr sz="1200" b="1">
                 <a:solidFill>
-                  <a:srgbClr val="059669"/>
-                </a:solidFill>
-                <a:latin typeface="Inter"/>
+                  <a:srgbClr val="810EB1"/>
+                </a:solidFill>
+                <a:latin typeface="Source Sans Pro"/>
               </a:defRPr>
             </a:pPr>
             <a:r>
@@ -7686,7 +7734,7 @@
                 <a:solidFill>
                   <a:srgbClr val="000000"/>
                 </a:solidFill>
-                <a:latin typeface="Inter"/>
+                <a:latin typeface="Source Sans Pro"/>
               </a:defRPr>
             </a:pPr>
             <a:r>
@@ -7711,7 +7759,7 @@
           </a:prstGeom>
           <a:ln w="19050">
             <a:solidFill>
-              <a:srgbClr val="059669"/>
+              <a:srgbClr val="810EB1"/>
             </a:solidFill>
           </a:ln>
         </p:spPr>
@@ -7755,9 +7803,9 @@
             <a:pPr>
               <a:defRPr sz="1200" b="1">
                 <a:solidFill>
-                  <a:srgbClr val="059669"/>
-                </a:solidFill>
-                <a:latin typeface="Inter"/>
+                  <a:srgbClr val="810EB1"/>
+                </a:solidFill>
+                <a:latin typeface="Source Sans Pro"/>
               </a:defRPr>
             </a:pPr>
             <a:r>
@@ -7793,7 +7841,7 @@
                 <a:solidFill>
                   <a:srgbClr val="666666"/>
                 </a:solidFill>
-                <a:latin typeface="Inter"/>
+                <a:latin typeface="Source Sans Pro"/>
               </a:defRPr>
             </a:pPr>
             <a:r>
@@ -7829,7 +7877,7 @@
                 <a:solidFill>
                   <a:srgbClr val="666666"/>
                 </a:solidFill>
-                <a:latin typeface="Inter"/>
+                <a:latin typeface="Source Sans Pro"/>
               </a:defRPr>
             </a:pPr>
             <a:r>
@@ -7865,7 +7913,7 @@
                 <a:solidFill>
                   <a:srgbClr val="666666"/>
                 </a:solidFill>
-                <a:latin typeface="Inter"/>
+                <a:latin typeface="Source Sans Pro"/>
               </a:defRPr>
             </a:pPr>
             <a:r>
@@ -7901,7 +7949,7 @@
                 <a:solidFill>
                   <a:srgbClr val="000000"/>
                 </a:solidFill>
-                <a:latin typeface="Inter"/>
+                <a:latin typeface="Source Sans Pro"/>
               </a:defRPr>
             </a:pPr>
             <a:r>
@@ -7926,7 +7974,7 @@
           </a:prstGeom>
           <a:ln w="19050">
             <a:solidFill>
-              <a:srgbClr val="059669"/>
+              <a:srgbClr val="810EB1"/>
             </a:solidFill>
           </a:ln>
         </p:spPr>
@@ -7970,9 +8018,9 @@
             <a:pPr>
               <a:defRPr sz="1200" b="1">
                 <a:solidFill>
-                  <a:srgbClr val="059669"/>
-                </a:solidFill>
-                <a:latin typeface="Inter"/>
+                  <a:srgbClr val="810EB1"/>
+                </a:solidFill>
+                <a:latin typeface="Source Sans Pro"/>
               </a:defRPr>
             </a:pPr>
             <a:r>
@@ -8008,7 +8056,7 @@
                 <a:solidFill>
                   <a:srgbClr val="666666"/>
                 </a:solidFill>
-                <a:latin typeface="Inter"/>
+                <a:latin typeface="Source Sans Pro"/>
               </a:defRPr>
             </a:pPr>
             <a:r>
@@ -8044,7 +8092,7 @@
                 <a:solidFill>
                   <a:srgbClr val="666666"/>
                 </a:solidFill>
-                <a:latin typeface="Inter"/>
+                <a:latin typeface="Source Sans Pro"/>
               </a:defRPr>
             </a:pPr>
             <a:r>
@@ -8080,7 +8128,7 @@
                 <a:solidFill>
                   <a:srgbClr val="666666"/>
                 </a:solidFill>
-                <a:latin typeface="Inter"/>
+                <a:latin typeface="Source Sans Pro"/>
               </a:defRPr>
             </a:pPr>
             <a:r>
@@ -8116,7 +8164,7 @@
                 <a:solidFill>
                   <a:srgbClr val="666666"/>
                 </a:solidFill>
-                <a:latin typeface="Inter"/>
+                <a:latin typeface="Source Sans Pro"/>
               </a:defRPr>
             </a:pPr>
             <a:r>
@@ -8152,7 +8200,7 @@
                 <a:solidFill>
                   <a:srgbClr val="000000"/>
                 </a:solidFill>
-                <a:latin typeface="Inter"/>
+                <a:latin typeface="Source Sans Pro"/>
               </a:defRPr>
             </a:pPr>
             <a:r>
@@ -8177,7 +8225,7 @@
           </a:prstGeom>
           <a:ln w="19050">
             <a:solidFill>
-              <a:srgbClr val="059669"/>
+              <a:srgbClr val="810EB1"/>
             </a:solidFill>
           </a:ln>
         </p:spPr>
@@ -8221,9 +8269,9 @@
             <a:pPr>
               <a:defRPr sz="1200" b="1">
                 <a:solidFill>
-                  <a:srgbClr val="059669"/>
-                </a:solidFill>
-                <a:latin typeface="Inter"/>
+                  <a:srgbClr val="810EB1"/>
+                </a:solidFill>
+                <a:latin typeface="Source Sans Pro"/>
               </a:defRPr>
             </a:pPr>
             <a:r>
@@ -8259,7 +8307,7 @@
                 <a:solidFill>
                   <a:srgbClr val="666666"/>
                 </a:solidFill>
-                <a:latin typeface="Inter"/>
+                <a:latin typeface="Source Sans Pro"/>
               </a:defRPr>
             </a:pPr>
             <a:r>
@@ -8295,7 +8343,7 @@
                 <a:solidFill>
                   <a:srgbClr val="666666"/>
                 </a:solidFill>
-                <a:latin typeface="Inter"/>
+                <a:latin typeface="Source Sans Pro"/>
               </a:defRPr>
             </a:pPr>
             <a:r>
@@ -8331,7 +8379,7 @@
                 <a:solidFill>
                   <a:srgbClr val="666666"/>
                 </a:solidFill>
-                <a:latin typeface="Inter"/>
+                <a:latin typeface="Source Sans Pro"/>
               </a:defRPr>
             </a:pPr>
             <a:r>
@@ -8367,7 +8415,7 @@
                 <a:solidFill>
                   <a:srgbClr val="000000"/>
                 </a:solidFill>
-                <a:latin typeface="Inter"/>
+                <a:latin typeface="Source Sans Pro"/>
               </a:defRPr>
             </a:pPr>
             <a:r>
@@ -8392,7 +8440,7 @@
           </a:prstGeom>
           <a:ln w="19050">
             <a:solidFill>
-              <a:srgbClr val="059669"/>
+              <a:srgbClr val="810EB1"/>
             </a:solidFill>
           </a:ln>
         </p:spPr>
@@ -8436,9 +8484,9 @@
             <a:pPr>
               <a:defRPr sz="1200" b="1">
                 <a:solidFill>
-                  <a:srgbClr val="059669"/>
-                </a:solidFill>
-                <a:latin typeface="Inter"/>
+                  <a:srgbClr val="810EB1"/>
+                </a:solidFill>
+                <a:latin typeface="Source Sans Pro"/>
               </a:defRPr>
             </a:pPr>
             <a:r>
@@ -8474,7 +8522,7 @@
                 <a:solidFill>
                   <a:srgbClr val="666666"/>
                 </a:solidFill>
-                <a:latin typeface="Inter"/>
+                <a:latin typeface="Source Sans Pro"/>
               </a:defRPr>
             </a:pPr>
             <a:r>
@@ -8510,7 +8558,7 @@
                 <a:solidFill>
                   <a:srgbClr val="666666"/>
                 </a:solidFill>
-                <a:latin typeface="Inter"/>
+                <a:latin typeface="Source Sans Pro"/>
               </a:defRPr>
             </a:pPr>
             <a:r>
@@ -8547,7 +8595,7 @@
       <p:grpSpPr/>
       <p:pic>
         <p:nvPicPr>
-          <p:cNvPr id="2" name="Picture 1" descr="chaayos_tshirt_white_20250904_023035_1c861664.png"/>
+          <p:cNvPr id="2" name="Picture 1" descr="chaayos_tshirt_white_20251010_134009_cf82914a.png"/>
           <p:cNvPicPr>
             <a:picLocks noChangeAspect="1"/>
           </p:cNvPicPr>
@@ -8571,7 +8619,7 @@
       </p:pic>
       <p:pic>
         <p:nvPicPr>
-          <p:cNvPr id="3" name="Picture 2" descr="chaayos_tshirt_black_20250904_023044_7bd0f7b9.png"/>
+          <p:cNvPr id="3" name="Picture 2" descr="chaayos_tshirt_black_20251010_134020_ab18b491.png"/>
           <p:cNvPicPr>
             <a:picLocks noChangeAspect="1"/>
           </p:cNvPicPr>
@@ -8595,7 +8643,7 @@
       </p:pic>
       <p:pic>
         <p:nvPicPr>
-          <p:cNvPr id="4" name="Picture 3" descr="chaayos_tshirt_yellow_20250904_023053_bedc7c02.png"/>
+          <p:cNvPr id="4" name="Picture 3" descr="chaayos_tshirt_yellow_20251010_134032_ddc6aff9.png"/>
           <p:cNvPicPr>
             <a:picLocks noChangeAspect="1"/>
           </p:cNvPicPr>
@@ -8679,7 +8727,7 @@
                 <a:solidFill>
                   <a:srgbClr val="000000"/>
                 </a:solidFill>
-                <a:latin typeface="Source Sans Pro"/>
+                <a:latin typeface="Inter"/>
               </a:defRPr>
             </a:pPr>
             <a:r>
@@ -8716,7 +8764,7 @@
       <p:grpSpPr/>
       <p:pic>
         <p:nvPicPr>
-          <p:cNvPr id="2" name="Picture 1" descr="chaayos_mug_white_20250904_023103_1ab9ddd9.png"/>
+          <p:cNvPr id="2" name="Picture 1" descr="chaayos_mug_white_20251010_134041_2467b2ef.png"/>
           <p:cNvPicPr>
             <a:picLocks noChangeAspect="1"/>
           </p:cNvPicPr>
@@ -8740,7 +8788,7 @@
       </p:pic>
       <p:pic>
         <p:nvPicPr>
-          <p:cNvPr id="3" name="Picture 2" descr="chaayos_mug_black_20250904_023112_16741d2d.png"/>
+          <p:cNvPr id="3" name="Picture 2" descr="chaayos_mug_black_20251010_134050_47e38f38.png"/>
           <p:cNvPicPr>
             <a:picLocks noChangeAspect="1"/>
           </p:cNvPicPr>
@@ -8764,7 +8812,7 @@
       </p:pic>
       <p:pic>
         <p:nvPicPr>
-          <p:cNvPr id="4" name="Picture 3" descr="chaayos_mug_primary_20250904_023120_44d92003.png"/>
+          <p:cNvPr id="4" name="Picture 3" descr="chaayos_mug_primary_20251010_134101_fc27586c.png"/>
           <p:cNvPicPr>
             <a:picLocks noChangeAspect="1"/>
           </p:cNvPicPr>
@@ -8848,7 +8896,7 @@
                 <a:solidFill>
                   <a:srgbClr val="000000"/>
                 </a:solidFill>
-                <a:latin typeface="Source Sans Pro"/>
+                <a:latin typeface="Inter"/>
               </a:defRPr>
             </a:pPr>
             <a:r>
@@ -8913,11 +8961,11 @@
                 <a:solidFill>
                   <a:srgbClr val="000000"/>
                 </a:solidFill>
-                <a:latin typeface="Inter"/>
-              </a:defRPr>
-            </a:pPr>
-            <a:r>
-              <a:t>Step into the world of Chaayos, where traditional chai culture meets modern innovation. As India's premier tea café destination, we craft every cup with precision and passion, offering a perfect blend of authenticity and contemporary comfort. Our globally recognized brand stands on the pillars of personalization, consistency, and an unwavering commitment to quality. From bustling professionals to leisurely tea connoisseurs, we create a vibrant space where conversations flow as freely as our signature brews, serving up more than just chai – we're crafting daily moments of joy and connection across our ever-growing family of cafés.</a:t>
+                <a:latin typeface="Source Sans Pro"/>
+              </a:defRPr>
+            </a:pPr>
+            <a:r>
+              <a:t>Welcome to Chaayos' brand identity system, where traditional chai meets modern innovation in the quick-service café landscape. Our meticulously crafted system delivers an internationally recognizable and consistently premium experience, while maintaining our distinctive position in the Food &amp; Beverage sector. Through our proprietary brewing technology and personalization platform, we've revolutionized the art of serving India's favorite beverage. We pride ourselves on creating engaging spaces where urban professionals, students, and chai enthusiasts come together to enjoy perfectly customized cups of tea, backed by our unwavering commitment to quality and authenticity.</a:t>
             </a:r>
           </a:p>
         </p:txBody>
@@ -8938,7 +8986,7 @@
           </a:prstGeom>
           <a:ln w="25400">
             <a:solidFill>
-              <a:srgbClr val="059669"/>
+              <a:srgbClr val="810EB1"/>
             </a:solidFill>
           </a:ln>
         </p:spPr>
@@ -8982,9 +9030,9 @@
             <a:pPr algn="l">
               <a:defRPr sz="2800" b="1">
                 <a:solidFill>
-                  <a:srgbClr val="059669"/>
-                </a:solidFill>
-                <a:latin typeface="Source Sans Pro"/>
+                  <a:srgbClr val="810EB1"/>
+                </a:solidFill>
+                <a:latin typeface="Inter"/>
               </a:defRPr>
             </a:pPr>
             <a:r>
@@ -9049,11 +9097,11 @@
                 <a:solidFill>
                   <a:srgbClr val="000000"/>
                 </a:solidFill>
-                <a:latin typeface="Inter"/>
-              </a:defRPr>
-            </a:pPr>
-            <a:r>
-              <a:t>At Chaayos, we envision a world where every cup of tea sparks innovation, connects communities, and brings warmth to the hearts of Urban youth, Working professionals, Tea enthusiasts, Families, Students, and Millennials. Our ultimate goal is to redefine the tea experience, inspiring creativity and delight in every sip.</a:t>
+                <a:latin typeface="Source Sans Pro"/>
+              </a:defRPr>
+            </a:pPr>
+            <a:r>
+              <a:t>At Chaayos, our vision is to revolutionize the chai experience for urban working professionals, college students, and tea aficionados by offering a sanctuary of hygienic, personalized, and innovative tea solutions that cater to the diverse tastes and preferences of our discerning customers. We aspire to be the go-to destination that blends tradition with modernity, creating moments of relaxation and joy through each sip.</a:t>
             </a:r>
           </a:p>
         </p:txBody>
@@ -9074,7 +9122,7 @@
           </a:prstGeom>
           <a:ln w="25400">
             <a:solidFill>
-              <a:srgbClr val="059669"/>
+              <a:srgbClr val="810EB1"/>
             </a:solidFill>
           </a:ln>
         </p:spPr>
@@ -9118,9 +9166,9 @@
             <a:pPr algn="l">
               <a:defRPr sz="2800" b="1">
                 <a:solidFill>
-                  <a:srgbClr val="059669"/>
-                </a:solidFill>
-                <a:latin typeface="Source Sans Pro"/>
+                  <a:srgbClr val="810EB1"/>
+                </a:solidFill>
+                <a:latin typeface="Inter"/>
               </a:defRPr>
             </a:pPr>
             <a:r>
@@ -9185,11 +9233,11 @@
                 <a:solidFill>
                   <a:srgbClr val="000000"/>
                 </a:solidFill>
-                <a:latin typeface="Inter"/>
-              </a:defRPr>
-            </a:pPr>
-            <a:r>
-              <a:t>Chaayos is dedicated to crafting unique and authentic Food &amp; Beverage solutions tailored to the diverse tastes of Urban youth, Working professionals, Tea enthusiasts, Families, Students, and Millennials. We strive to provide a premium tea café and quick-service restaurant experience that is innovative, reliable, and focused on customer satisfaction.</a:t>
+                <a:latin typeface="Source Sans Pro"/>
+              </a:defRPr>
+            </a:pPr>
+            <a:r>
+              <a:t>Our mission at Chaayos is to redefine the Quick Service Tea Café industry by providing top-tier quality, customizable chai experiences that prioritize customer satisfaction, uphold the highest standards of hygiene, and showcase relentless innovation in every cup. We aim to elevate the tea-drinking culture, offering a premium and trustworthy space where tea lovers can unwind, reconnect with tradition, and celebrate the art of personalized tea crafting.</a:t>
             </a:r>
           </a:p>
         </p:txBody>
@@ -9210,7 +9258,7 @@
           </a:prstGeom>
           <a:ln w="25400">
             <a:solidFill>
-              <a:srgbClr val="059669"/>
+              <a:srgbClr val="810EB1"/>
             </a:solidFill>
           </a:ln>
         </p:spPr>
@@ -9254,9 +9302,9 @@
             <a:pPr algn="l">
               <a:defRPr sz="2800" b="1">
                 <a:solidFill>
-                  <a:srgbClr val="059669"/>
-                </a:solidFill>
-                <a:latin typeface="Source Sans Pro"/>
+                  <a:srgbClr val="810EB1"/>
+                </a:solidFill>
+                <a:latin typeface="Inter"/>
               </a:defRPr>
             </a:pPr>
             <a:r>
@@ -9321,11 +9369,11 @@
                 <a:solidFill>
                   <a:srgbClr val="000000"/>
                 </a:solidFill>
-                <a:latin typeface="Inter"/>
-              </a:defRPr>
-            </a:pPr>
-            <a:r>
-              <a:t>Our foundation at Chaayos is built on the pillars of Warmth, Innovation, Authenticity, Customer Delight, Community, Quality, and Personalization. We infuse these values into every aspect of our tea café and quick-service restaurants, creating spaces that not only serve exceptional tea but also foster a sense of belonging, creativity, and joy for all who walk through our doors.</a:t>
+                <a:latin typeface="Source Sans Pro"/>
+              </a:defRPr>
+            </a:pPr>
+            <a:r>
+              <a:t>At Chaayos, we embody the essence of personalization by curating chai experiences tailored to individual preferences, ensuring every cup tells a unique story. Our commitment to quality is unwavering, sourcing the finest ingredients to deliver an unparalleled taste that resonates with our health-conscious customers. Innovation drives us forward, as we constantly seek new ways to enhance customer experience through technology and user-centric design. Hygiene is our priority, guaranteeing a safe and clean environment for our customers to indulge in their favorite brews. We honor tradition by infusing timeless tea rituals into our modern setting, creating a harmonious blend of old and new. Lastly, we provide a space for relaxation, where urban professionals and students alike can unwind, recharge, and find solace in the simple pleasure of a perfect cup of chai.</a:t>
             </a:r>
           </a:p>
         </p:txBody>
@@ -9346,7 +9394,7 @@
           </a:prstGeom>
           <a:ln w="25400">
             <a:solidFill>
-              <a:srgbClr val="059669"/>
+              <a:srgbClr val="810EB1"/>
             </a:solidFill>
           </a:ln>
         </p:spPr>
@@ -9390,9 +9438,9 @@
             <a:pPr algn="l">
               <a:defRPr sz="2800" b="1">
                 <a:solidFill>
-                  <a:srgbClr val="059669"/>
-                </a:solidFill>
-                <a:latin typeface="Source Sans Pro"/>
+                  <a:srgbClr val="810EB1"/>
+                </a:solidFill>
+                <a:latin typeface="Inter"/>
               </a:defRPr>
             </a:pPr>
             <a:r>
@@ -9457,11 +9505,11 @@
                 <a:solidFill>
                   <a:srgbClr val="000000"/>
                 </a:solidFill>
-                <a:latin typeface="Inter"/>
-              </a:defRPr>
-            </a:pPr>
-            <a:r>
-              <a:t>In the bustling streets of modern cities, where the rhythm of life never seems to slow down, there exists a sanctuary for the urban youth, working professionals, tea enthusiasts, families, students, and millennials - Chaayos. Born out of a deep passion for tea and a desire to revolutionize the way people experience this beloved beverage, Chaayos stands as a beacon of warmth, innovation, and authenticity in a sea of generic cafes and restaurants. At the heart of Chaayos lies a commitment to customer delight, where every sip of tea is crafted with precision and care, ensuring a moment of pure bliss with each cup.</a:t>
+                <a:latin typeface="Source Sans Pro"/>
+              </a:defRPr>
+            </a:pPr>
+            <a:r>
+              <a:t>In the bustling streets of urban India, where the aroma of freshly brewed chai dances in the air, there stands a haven for tea aficionados – Chaayos. Born out of a passion for chai and a desire to revolutionize the way we experience this beloved beverage, Chaayos is not just a tea café; it's a sanctuary for those who seek comfort, innovation, and a touch of tradition in every sip. Picture this: You, a busy urban professional, tired from a long day at work, craving for a moment of respite. You step into Chaayos, greeted by the warm and inviting aroma of masala chai and freshly baked snacks.</a:t>
             </a:r>
           </a:p>
         </p:txBody>
@@ -9482,7 +9530,7 @@
           </a:prstGeom>
           <a:ln w="25400">
             <a:solidFill>
-              <a:srgbClr val="059669"/>
+              <a:srgbClr val="810EB1"/>
             </a:solidFill>
           </a:ln>
         </p:spPr>
@@ -9526,9 +9574,9 @@
             <a:pPr algn="l">
               <a:defRPr sz="2800" b="1">
                 <a:solidFill>
-                  <a:srgbClr val="059669"/>
-                </a:solidFill>
-                <a:latin typeface="Source Sans Pro"/>
+                  <a:srgbClr val="810EB1"/>
+                </a:solidFill>
+                <a:latin typeface="Inter"/>
               </a:defRPr>
             </a:pPr>
             <a:r>
@@ -9593,11 +9641,11 @@
                 <a:solidFill>
                   <a:srgbClr val="000000"/>
                 </a:solidFill>
-                <a:latin typeface="Inter"/>
-              </a:defRPr>
-            </a:pPr>
-            <a:r>
-              <a:t>Our mission is simple yet profound - to empower individuals through our innovative food and beverage solutions, creating a space where communities thrive and connections are forged over a steaming cup of chai. Step into a Chaayos outlet, and you will be greeted by the aroma of freshly brewed teas, the sound of laughter and conversation, and the sight of vibrant decor that invites you to unwind and relax. Our menu, carefully curated to cater to the diverse tastes of our patrons, offers a unique blend of traditional and contemporary flavors, each dish prepared with the...</a:t>
+                <a:latin typeface="Source Sans Pro"/>
+              </a:defRPr>
+            </a:pPr>
+            <a:r>
+              <a:t>The ambiance is modern yet cozy, a perfect blend of old-world charm and contemporary sophistication. As you approach the counter, you are met with a plethora of options to customize your chai – from the strength of the brew to the choice of spices and sweeteners. This is not just tea; this is your tea, tailored to suit your taste buds and rejuvenate your senses. At Chaayos, we understand that tea is not just a beverage; it's an experience. That's why we source the finest tea leaves, herbs, and spices, ensuring that...</a:t>
             </a:r>
           </a:p>
         </p:txBody>
@@ -9618,7 +9666,7 @@
           </a:prstGeom>
           <a:ln w="25400">
             <a:solidFill>
-              <a:srgbClr val="059669"/>
+              <a:srgbClr val="810EB1"/>
             </a:solidFill>
           </a:ln>
         </p:spPr>
@@ -9662,9 +9710,9 @@
             <a:pPr algn="l">
               <a:defRPr sz="2800" b="1">
                 <a:solidFill>
-                  <a:srgbClr val="059669"/>
-                </a:solidFill>
-                <a:latin typeface="Source Sans Pro"/>
+                  <a:srgbClr val="810EB1"/>
+                </a:solidFill>
+                <a:latin typeface="Inter"/>
               </a:defRPr>
             </a:pPr>
             <a:r>
@@ -9701,7 +9749,7 @@
       <p:grpSpPr/>
       <p:pic>
         <p:nvPicPr>
-          <p:cNvPr id="2" name="Picture 1" descr="chaayos_logo_1_20250904_022851_3cb662a1.png"/>
+          <p:cNvPr id="2" name="Picture 1" descr="chaayos_logo_1_20251010_133827_0294b6a2.png"/>
           <p:cNvPicPr>
             <a:picLocks noChangeAspect="1"/>
           </p:cNvPicPr>
@@ -9753,7 +9801,7 @@
                 <a:solidFill>
                   <a:srgbClr val="000000"/>
                 </a:solidFill>
-                <a:latin typeface="Inter"/>
+                <a:latin typeface="Source Sans Pro"/>
               </a:defRPr>
             </a:pPr>
             <a:r>
@@ -9778,7 +9826,7 @@
           </a:prstGeom>
           <a:ln w="25400">
             <a:solidFill>
-              <a:srgbClr val="059669"/>
+              <a:srgbClr val="810EB1"/>
             </a:solidFill>
           </a:ln>
         </p:spPr>
@@ -9822,9 +9870,9 @@
             <a:pPr algn="l">
               <a:defRPr sz="2800" b="1">
                 <a:solidFill>
-                  <a:srgbClr val="059669"/>
-                </a:solidFill>
-                <a:latin typeface="Source Sans Pro"/>
+                  <a:srgbClr val="810EB1"/>
+                </a:solidFill>
+                <a:latin typeface="Inter"/>
               </a:defRPr>
             </a:pPr>
             <a:r>
